--- a/Royal_Enfield_Review_Analysis/outputs/Royal_Enfield_App_Review_Analysis.pptx
+++ b/Royal_Enfield_Review_Analysis/outputs/Royal_Enfield_App_Review_Analysis.pptx
@@ -5,15 +5,16 @@
     <p:sldMasterId id="2147483648" r:id="rId1"/>
   </p:sldMasterIdLst>
   <p:notesMasterIdLst>
-    <p:notesMasterId r:id="rId8"/>
+    <p:notesMasterId r:id="rId9"/>
   </p:notesMasterIdLst>
   <p:sldIdLst>
-    <p:sldId id="256" r:id="rId2"/>
-    <p:sldId id="257" r:id="rId3"/>
-    <p:sldId id="258" r:id="rId4"/>
-    <p:sldId id="259" r:id="rId5"/>
-    <p:sldId id="260" r:id="rId6"/>
-    <p:sldId id="261" r:id="rId7"/>
+    <p:sldId id="262" r:id="rId2"/>
+    <p:sldId id="256" r:id="rId3"/>
+    <p:sldId id="257" r:id="rId4"/>
+    <p:sldId id="258" r:id="rId5"/>
+    <p:sldId id="259" r:id="rId6"/>
+    <p:sldId id="260" r:id="rId7"/>
+    <p:sldId id="261" r:id="rId8"/>
   </p:sldIdLst>
   <p:sldSz cx="12192000" cy="6858000"/>
   <p:notesSz cx="6858000" cy="12192000"/>
@@ -115,6 +116,247 @@
     </p:ext>
   </p:extLst>
 </p:presentation>
+</file>
+
+<file path=ppt/revisionInfo.xml><?xml version="1.0" encoding="utf-8"?>
+<p1510:revInfo xmlns:a="http://schemas.openxmlformats.org/drawingml/2006/main" xmlns:r="http://schemas.openxmlformats.org/officeDocument/2006/relationships" xmlns:p1510="http://schemas.microsoft.com/office/powerpoint/2015/10/main">
+  <p1510:revLst>
+    <p1510:client id="{FF311939-339C-43AA-A108-1F8163A7C87D}" v="60" dt="2026-04-07T12:13:20.435"/>
+  </p1510:revLst>
+</p1510:revInfo>
+</file>
+
+<file path=ppt/changesInfos/changesInfo1.xml><?xml version="1.0" encoding="utf-8"?>
+<pc:chgInfo xmlns:a="http://schemas.openxmlformats.org/drawingml/2006/main" xmlns:r="http://schemas.openxmlformats.org/officeDocument/2006/relationships" xmlns:ac="http://schemas.microsoft.com/office/drawing/2013/main/command" xmlns:pc="http://schemas.microsoft.com/office/powerpoint/2013/main/command">
+  <pc:docChgLst>
+    <pc:chgData name="Muthukumaran P @ 4i" userId="d115ef4f-9210-40e8-8b7c-248cb41229ac" providerId="ADAL" clId="{B42F7210-19DA-46E6-9A45-39B2C33267D7}"/>
+    <pc:docChg chg="undo custSel addSld delSld modSld sldOrd">
+      <pc:chgData name="Muthukumaran P @ 4i" userId="d115ef4f-9210-40e8-8b7c-248cb41229ac" providerId="ADAL" clId="{B42F7210-19DA-46E6-9A45-39B2C33267D7}" dt="2026-04-07T12:13:44.357" v="250" actId="27107"/>
+      <pc:docMkLst>
+        <pc:docMk/>
+      </pc:docMkLst>
+      <pc:sldChg chg="modSp mod">
+        <pc:chgData name="Muthukumaran P @ 4i" userId="d115ef4f-9210-40e8-8b7c-248cb41229ac" providerId="ADAL" clId="{B42F7210-19DA-46E6-9A45-39B2C33267D7}" dt="2026-04-07T12:08:32.525" v="230" actId="20577"/>
+        <pc:sldMkLst>
+          <pc:docMk/>
+          <pc:sldMk cId="0" sldId="256"/>
+        </pc:sldMkLst>
+        <pc:spChg chg="mod">
+          <ac:chgData name="Muthukumaran P @ 4i" userId="d115ef4f-9210-40e8-8b7c-248cb41229ac" providerId="ADAL" clId="{B42F7210-19DA-46E6-9A45-39B2C33267D7}" dt="2026-04-07T12:04:43.681" v="193" actId="255"/>
+          <ac:spMkLst>
+            <pc:docMk/>
+            <pc:sldMk cId="0" sldId="256"/>
+            <ac:spMk id="9" creationId="{00000000-0000-0000-0000-000000000000}"/>
+          </ac:spMkLst>
+        </pc:spChg>
+        <pc:spChg chg="mod">
+          <ac:chgData name="Muthukumaran P @ 4i" userId="d115ef4f-9210-40e8-8b7c-248cb41229ac" providerId="ADAL" clId="{B42F7210-19DA-46E6-9A45-39B2C33267D7}" dt="2026-04-07T12:05:06.892" v="198" actId="1035"/>
+          <ac:spMkLst>
+            <pc:docMk/>
+            <pc:sldMk cId="0" sldId="256"/>
+            <ac:spMk id="10" creationId="{00000000-0000-0000-0000-000000000000}"/>
+          </ac:spMkLst>
+        </pc:spChg>
+        <pc:spChg chg="mod">
+          <ac:chgData name="Muthukumaran P @ 4i" userId="d115ef4f-9210-40e8-8b7c-248cb41229ac" providerId="ADAL" clId="{B42F7210-19DA-46E6-9A45-39B2C33267D7}" dt="2026-04-07T12:05:01.648" v="197" actId="1036"/>
+          <ac:spMkLst>
+            <pc:docMk/>
+            <pc:sldMk cId="0" sldId="256"/>
+            <ac:spMk id="11" creationId="{00000000-0000-0000-0000-000000000000}"/>
+          </ac:spMkLst>
+        </pc:spChg>
+        <pc:spChg chg="mod">
+          <ac:chgData name="Muthukumaran P @ 4i" userId="d115ef4f-9210-40e8-8b7c-248cb41229ac" providerId="ADAL" clId="{B42F7210-19DA-46E6-9A45-39B2C33267D7}" dt="2026-04-07T12:03:55.547" v="146" actId="1036"/>
+          <ac:spMkLst>
+            <pc:docMk/>
+            <pc:sldMk cId="0" sldId="256"/>
+            <ac:spMk id="12" creationId="{00000000-0000-0000-0000-000000000000}"/>
+          </ac:spMkLst>
+        </pc:spChg>
+        <pc:spChg chg="mod">
+          <ac:chgData name="Muthukumaran P @ 4i" userId="d115ef4f-9210-40e8-8b7c-248cb41229ac" providerId="ADAL" clId="{B42F7210-19DA-46E6-9A45-39B2C33267D7}" dt="2026-04-07T12:03:55.547" v="146" actId="1036"/>
+          <ac:spMkLst>
+            <pc:docMk/>
+            <pc:sldMk cId="0" sldId="256"/>
+            <ac:spMk id="13" creationId="{00000000-0000-0000-0000-000000000000}"/>
+          </ac:spMkLst>
+        </pc:spChg>
+        <pc:spChg chg="mod">
+          <ac:chgData name="Muthukumaran P @ 4i" userId="d115ef4f-9210-40e8-8b7c-248cb41229ac" providerId="ADAL" clId="{B42F7210-19DA-46E6-9A45-39B2C33267D7}" dt="2026-04-07T12:03:55.547" v="146" actId="1036"/>
+          <ac:spMkLst>
+            <pc:docMk/>
+            <pc:sldMk cId="0" sldId="256"/>
+            <ac:spMk id="14" creationId="{00000000-0000-0000-0000-000000000000}"/>
+          </ac:spMkLst>
+        </pc:spChg>
+        <pc:spChg chg="mod">
+          <ac:chgData name="Muthukumaran P @ 4i" userId="d115ef4f-9210-40e8-8b7c-248cb41229ac" providerId="ADAL" clId="{B42F7210-19DA-46E6-9A45-39B2C33267D7}" dt="2026-04-07T12:03:55.547" v="146" actId="1036"/>
+          <ac:spMkLst>
+            <pc:docMk/>
+            <pc:sldMk cId="0" sldId="256"/>
+            <ac:spMk id="15" creationId="{00000000-0000-0000-0000-000000000000}"/>
+          </ac:spMkLst>
+        </pc:spChg>
+        <pc:spChg chg="mod">
+          <ac:chgData name="Muthukumaran P @ 4i" userId="d115ef4f-9210-40e8-8b7c-248cb41229ac" providerId="ADAL" clId="{B42F7210-19DA-46E6-9A45-39B2C33267D7}" dt="2026-04-07T12:03:55.547" v="146" actId="1036"/>
+          <ac:spMkLst>
+            <pc:docMk/>
+            <pc:sldMk cId="0" sldId="256"/>
+            <ac:spMk id="16" creationId="{00000000-0000-0000-0000-000000000000}"/>
+          </ac:spMkLst>
+        </pc:spChg>
+        <pc:spChg chg="mod">
+          <ac:chgData name="Muthukumaran P @ 4i" userId="d115ef4f-9210-40e8-8b7c-248cb41229ac" providerId="ADAL" clId="{B42F7210-19DA-46E6-9A45-39B2C33267D7}" dt="2026-04-07T12:03:55.547" v="146" actId="1036"/>
+          <ac:spMkLst>
+            <pc:docMk/>
+            <pc:sldMk cId="0" sldId="256"/>
+            <ac:spMk id="17" creationId="{00000000-0000-0000-0000-000000000000}"/>
+          </ac:spMkLst>
+        </pc:spChg>
+        <pc:spChg chg="mod">
+          <ac:chgData name="Muthukumaran P @ 4i" userId="d115ef4f-9210-40e8-8b7c-248cb41229ac" providerId="ADAL" clId="{B42F7210-19DA-46E6-9A45-39B2C33267D7}" dt="2026-04-07T12:03:46.381" v="119" actId="1036"/>
+          <ac:spMkLst>
+            <pc:docMk/>
+            <pc:sldMk cId="0" sldId="256"/>
+            <ac:spMk id="18" creationId="{00000000-0000-0000-0000-000000000000}"/>
+          </ac:spMkLst>
+        </pc:spChg>
+        <pc:spChg chg="mod">
+          <ac:chgData name="Muthukumaran P @ 4i" userId="d115ef4f-9210-40e8-8b7c-248cb41229ac" providerId="ADAL" clId="{B42F7210-19DA-46E6-9A45-39B2C33267D7}" dt="2026-04-07T12:03:46.381" v="119" actId="1036"/>
+          <ac:spMkLst>
+            <pc:docMk/>
+            <pc:sldMk cId="0" sldId="256"/>
+            <ac:spMk id="19" creationId="{00000000-0000-0000-0000-000000000000}"/>
+          </ac:spMkLst>
+        </pc:spChg>
+        <pc:spChg chg="mod">
+          <ac:chgData name="Muthukumaran P @ 4i" userId="d115ef4f-9210-40e8-8b7c-248cb41229ac" providerId="ADAL" clId="{B42F7210-19DA-46E6-9A45-39B2C33267D7}" dt="2026-04-07T12:03:46.381" v="119" actId="1036"/>
+          <ac:spMkLst>
+            <pc:docMk/>
+            <pc:sldMk cId="0" sldId="256"/>
+            <ac:spMk id="20" creationId="{00000000-0000-0000-0000-000000000000}"/>
+          </ac:spMkLst>
+        </pc:spChg>
+        <pc:spChg chg="mod">
+          <ac:chgData name="Muthukumaran P @ 4i" userId="d115ef4f-9210-40e8-8b7c-248cb41229ac" providerId="ADAL" clId="{B42F7210-19DA-46E6-9A45-39B2C33267D7}" dt="2026-04-07T12:03:46.381" v="119" actId="1036"/>
+          <ac:spMkLst>
+            <pc:docMk/>
+            <pc:sldMk cId="0" sldId="256"/>
+            <ac:spMk id="21" creationId="{00000000-0000-0000-0000-000000000000}"/>
+          </ac:spMkLst>
+        </pc:spChg>
+        <pc:spChg chg="mod">
+          <ac:chgData name="Muthukumaran P @ 4i" userId="d115ef4f-9210-40e8-8b7c-248cb41229ac" providerId="ADAL" clId="{B42F7210-19DA-46E6-9A45-39B2C33267D7}" dt="2026-04-07T12:03:13.431" v="97"/>
+          <ac:spMkLst>
+            <pc:docMk/>
+            <pc:sldMk cId="0" sldId="256"/>
+            <ac:spMk id="28" creationId="{00000000-0000-0000-0000-000000000000}"/>
+          </ac:spMkLst>
+        </pc:spChg>
+        <pc:spChg chg="mod">
+          <ac:chgData name="Muthukumaran P @ 4i" userId="d115ef4f-9210-40e8-8b7c-248cb41229ac" providerId="ADAL" clId="{B42F7210-19DA-46E6-9A45-39B2C33267D7}" dt="2026-04-07T12:06:47.180" v="215" actId="14100"/>
+          <ac:spMkLst>
+            <pc:docMk/>
+            <pc:sldMk cId="0" sldId="256"/>
+            <ac:spMk id="32" creationId="{00000000-0000-0000-0000-000000000000}"/>
+          </ac:spMkLst>
+        </pc:spChg>
+        <pc:spChg chg="mod">
+          <ac:chgData name="Muthukumaran P @ 4i" userId="d115ef4f-9210-40e8-8b7c-248cb41229ac" providerId="ADAL" clId="{B42F7210-19DA-46E6-9A45-39B2C33267D7}" dt="2026-04-07T12:07:37.810" v="217"/>
+          <ac:spMkLst>
+            <pc:docMk/>
+            <pc:sldMk cId="0" sldId="256"/>
+            <ac:spMk id="36" creationId="{00000000-0000-0000-0000-000000000000}"/>
+          </ac:spMkLst>
+        </pc:spChg>
+        <pc:spChg chg="mod">
+          <ac:chgData name="Muthukumaran P @ 4i" userId="d115ef4f-9210-40e8-8b7c-248cb41229ac" providerId="ADAL" clId="{B42F7210-19DA-46E6-9A45-39B2C33267D7}" dt="2026-04-07T12:08:32.525" v="230" actId="20577"/>
+          <ac:spMkLst>
+            <pc:docMk/>
+            <pc:sldMk cId="0" sldId="256"/>
+            <ac:spMk id="40" creationId="{00000000-0000-0000-0000-000000000000}"/>
+          </ac:spMkLst>
+        </pc:spChg>
+      </pc:sldChg>
+      <pc:sldChg chg="modSp mod">
+        <pc:chgData name="Muthukumaran P @ 4i" userId="d115ef4f-9210-40e8-8b7c-248cb41229ac" providerId="ADAL" clId="{B42F7210-19DA-46E6-9A45-39B2C33267D7}" dt="2026-04-07T12:13:44.357" v="250" actId="27107"/>
+        <pc:sldMkLst>
+          <pc:docMk/>
+          <pc:sldMk cId="0" sldId="260"/>
+        </pc:sldMkLst>
+        <pc:spChg chg="mod">
+          <ac:chgData name="Muthukumaran P @ 4i" userId="d115ef4f-9210-40e8-8b7c-248cb41229ac" providerId="ADAL" clId="{B42F7210-19DA-46E6-9A45-39B2C33267D7}" dt="2026-04-07T12:10:50.940" v="234" actId="20577"/>
+          <ac:spMkLst>
+            <pc:docMk/>
+            <pc:sldMk cId="0" sldId="260"/>
+            <ac:spMk id="10" creationId="{00000000-0000-0000-0000-000000000000}"/>
+          </ac:spMkLst>
+        </pc:spChg>
+        <pc:spChg chg="mod">
+          <ac:chgData name="Muthukumaran P @ 4i" userId="d115ef4f-9210-40e8-8b7c-248cb41229ac" providerId="ADAL" clId="{B42F7210-19DA-46E6-9A45-39B2C33267D7}" dt="2026-04-07T12:11:43.381" v="240" actId="20577"/>
+          <ac:spMkLst>
+            <pc:docMk/>
+            <pc:sldMk cId="0" sldId="260"/>
+            <ac:spMk id="15" creationId="{00000000-0000-0000-0000-000000000000}"/>
+          </ac:spMkLst>
+        </pc:spChg>
+        <pc:spChg chg="mod">
+          <ac:chgData name="Muthukumaran P @ 4i" userId="d115ef4f-9210-40e8-8b7c-248cb41229ac" providerId="ADAL" clId="{B42F7210-19DA-46E6-9A45-39B2C33267D7}" dt="2026-04-07T12:12:49.690" v="244" actId="20577"/>
+          <ac:spMkLst>
+            <pc:docMk/>
+            <pc:sldMk cId="0" sldId="260"/>
+            <ac:spMk id="20" creationId="{00000000-0000-0000-0000-000000000000}"/>
+          </ac:spMkLst>
+        </pc:spChg>
+        <pc:spChg chg="mod">
+          <ac:chgData name="Muthukumaran P @ 4i" userId="d115ef4f-9210-40e8-8b7c-248cb41229ac" providerId="ADAL" clId="{B42F7210-19DA-46E6-9A45-39B2C33267D7}" dt="2026-04-07T12:13:44.357" v="250" actId="27107"/>
+          <ac:spMkLst>
+            <pc:docMk/>
+            <pc:sldMk cId="0" sldId="260"/>
+            <ac:spMk id="25" creationId="{00000000-0000-0000-0000-000000000000}"/>
+          </ac:spMkLst>
+        </pc:spChg>
+      </pc:sldChg>
+      <pc:sldChg chg="modSp add del mod ord setBg">
+        <pc:chgData name="Muthukumaran P @ 4i" userId="d115ef4f-9210-40e8-8b7c-248cb41229ac" providerId="ADAL" clId="{B42F7210-19DA-46E6-9A45-39B2C33267D7}" dt="2026-04-07T11:51:07.304" v="26" actId="1035"/>
+        <pc:sldMkLst>
+          <pc:docMk/>
+          <pc:sldMk cId="0" sldId="262"/>
+        </pc:sldMkLst>
+        <pc:spChg chg="mod">
+          <ac:chgData name="Muthukumaran P @ 4i" userId="d115ef4f-9210-40e8-8b7c-248cb41229ac" providerId="ADAL" clId="{B42F7210-19DA-46E6-9A45-39B2C33267D7}" dt="2026-04-07T11:51:01.210" v="22" actId="14100"/>
+          <ac:spMkLst>
+            <pc:docMk/>
+            <pc:sldMk cId="0" sldId="262"/>
+            <ac:spMk id="11" creationId="{00000000-0000-0000-0000-000000000000}"/>
+          </ac:spMkLst>
+        </pc:spChg>
+        <pc:spChg chg="mod">
+          <ac:chgData name="Muthukumaran P @ 4i" userId="d115ef4f-9210-40e8-8b7c-248cb41229ac" providerId="ADAL" clId="{B42F7210-19DA-46E6-9A45-39B2C33267D7}" dt="2026-04-07T11:51:07.304" v="26" actId="1035"/>
+          <ac:spMkLst>
+            <pc:docMk/>
+            <pc:sldMk cId="0" sldId="262"/>
+            <ac:spMk id="12" creationId="{00000000-0000-0000-0000-000000000000}"/>
+          </ac:spMkLst>
+        </pc:spChg>
+      </pc:sldChg>
+      <pc:sldChg chg="new del">
+        <pc:chgData name="Muthukumaran P @ 4i" userId="d115ef4f-9210-40e8-8b7c-248cb41229ac" providerId="ADAL" clId="{B42F7210-19DA-46E6-9A45-39B2C33267D7}" dt="2026-04-07T11:50:05.514" v="11" actId="47"/>
+        <pc:sldMkLst>
+          <pc:docMk/>
+          <pc:sldMk cId="1257748009" sldId="262"/>
+        </pc:sldMkLst>
+      </pc:sldChg>
+      <pc:sldChg chg="add del setBg">
+        <pc:chgData name="Muthukumaran P @ 4i" userId="d115ef4f-9210-40e8-8b7c-248cb41229ac" providerId="ADAL" clId="{B42F7210-19DA-46E6-9A45-39B2C33267D7}" dt="2026-04-07T11:50:02.561" v="10"/>
+        <pc:sldMkLst>
+          <pc:docMk/>
+          <pc:sldMk cId="0" sldId="263"/>
+        </pc:sldMkLst>
+      </pc:sldChg>
+    </pc:docChg>
+  </pc:docChgLst>
+</pc:chgInfo>
 </file>
 
 <file path=ppt/notesMasters/notesMaster1.xml><?xml version="1.0" encoding="utf-8"?>
@@ -270,6 +512,13 @@
           </p:nvPr>
         </p:nvSpPr>
         <p:spPr/>
+        <p:txBody>
+          <a:bodyPr/>
+          <a:lstStyle/>
+          <a:p>
+            <a:endParaRPr lang="en-US"/>
+          </a:p>
+        </p:txBody>
       </p:sp>
       <p:sp>
         <p:nvSpPr>
@@ -305,11 +554,71 @@
           <a:bodyPr/>
           <a:lstStyle/>
           <a:p>
+            <a:pPr marL="0" marR="0" lvl="0" indent="0" algn="l" defTabSz="914400" rtl="0" eaLnBrk="1" fontAlgn="auto" latinLnBrk="0" hangingPunct="1">
+              <a:lnSpc>
+                <a:spcPct val="100000"/>
+              </a:lnSpc>
+              <a:spcBef>
+                <a:spcPts val="0"/>
+              </a:spcBef>
+              <a:spcAft>
+                <a:spcPts val="0"/>
+              </a:spcAft>
+              <a:buClrTx/>
+              <a:buSzTx/>
+              <a:buFontTx/>
+              <a:buNone/>
+              <a:tabLst/>
+              <a:defRPr/>
+            </a:pPr>
             <a:fld id="{F7021451-1387-4CA6-816F-3879F97B5CBC}" type="slidenum">
-              <a:rPr lang="en-US"/>
+              <a:rPr kumimoji="0" lang="en-US" sz="1800" b="0" i="0" u="none" strike="noStrike" kern="1200" cap="none" spc="0" normalizeH="0" baseline="0" noProof="0">
+                <a:ln>
+                  <a:noFill/>
+                </a:ln>
+                <a:solidFill>
+                  <a:prstClr val="black"/>
+                </a:solidFill>
+                <a:effectLst/>
+                <a:uLnTx/>
+                <a:uFillTx/>
+                <a:latin typeface="Aptos" panose="02110004020202020204"/>
+                <a:ea typeface="+mn-ea"/>
+                <a:cs typeface="+mn-cs"/>
+              </a:rPr>
+              <a:pPr marL="0" marR="0" lvl="0" indent="0" algn="l" defTabSz="914400" rtl="0" eaLnBrk="1" fontAlgn="auto" latinLnBrk="0" hangingPunct="1">
+                <a:lnSpc>
+                  <a:spcPct val="100000"/>
+                </a:lnSpc>
+                <a:spcBef>
+                  <a:spcPts val="0"/>
+                </a:spcBef>
+                <a:spcAft>
+                  <a:spcPts val="0"/>
+                </a:spcAft>
+                <a:buClrTx/>
+                <a:buSzTx/>
+                <a:buFontTx/>
+                <a:buNone/>
+                <a:tabLst/>
+                <a:defRPr/>
+              </a:pPr>
               <a:t>1</a:t>
             </a:fld>
-            <a:endParaRPr lang="en-US"/>
+            <a:endParaRPr kumimoji="0" lang="en-US" sz="1800" b="0" i="0" u="none" strike="noStrike" kern="1200" cap="none" spc="0" normalizeH="0" baseline="0" noProof="0">
+              <a:ln>
+                <a:noFill/>
+              </a:ln>
+              <a:solidFill>
+                <a:prstClr val="black"/>
+              </a:solidFill>
+              <a:effectLst/>
+              <a:uLnTx/>
+              <a:uFillTx/>
+              <a:latin typeface="Aptos" panose="02110004020202020204"/>
+              <a:ea typeface="+mn-ea"/>
+              <a:cs typeface="+mn-cs"/>
+            </a:endParaRPr>
           </a:p>
         </p:txBody>
       </p:sp>
@@ -354,6 +663,13 @@
           </p:nvPr>
         </p:nvSpPr>
         <p:spPr/>
+        <p:txBody>
+          <a:bodyPr/>
+          <a:lstStyle/>
+          <a:p>
+            <a:endParaRPr lang="en-US"/>
+          </a:p>
+        </p:txBody>
       </p:sp>
       <p:sp>
         <p:nvSpPr>
@@ -438,6 +754,13 @@
           </p:nvPr>
         </p:nvSpPr>
         <p:spPr/>
+        <p:txBody>
+          <a:bodyPr/>
+          <a:lstStyle/>
+          <a:p>
+            <a:endParaRPr lang="en-US"/>
+          </a:p>
+        </p:txBody>
       </p:sp>
       <p:sp>
         <p:nvSpPr>
@@ -522,6 +845,13 @@
           </p:nvPr>
         </p:nvSpPr>
         <p:spPr/>
+        <p:txBody>
+          <a:bodyPr/>
+          <a:lstStyle/>
+          <a:p>
+            <a:endParaRPr lang="en-US"/>
+          </a:p>
+        </p:txBody>
       </p:sp>
       <p:sp>
         <p:nvSpPr>
@@ -606,6 +936,13 @@
           </p:nvPr>
         </p:nvSpPr>
         <p:spPr/>
+        <p:txBody>
+          <a:bodyPr/>
+          <a:lstStyle/>
+          <a:p>
+            <a:endParaRPr lang="en-US"/>
+          </a:p>
+        </p:txBody>
       </p:sp>
       <p:sp>
         <p:nvSpPr>
@@ -690,6 +1027,13 @@
           </p:nvPr>
         </p:nvSpPr>
         <p:spPr/>
+        <p:txBody>
+          <a:bodyPr/>
+          <a:lstStyle/>
+          <a:p>
+            <a:endParaRPr lang="en-US"/>
+          </a:p>
+        </p:txBody>
       </p:sp>
       <p:sp>
         <p:nvSpPr>
@@ -728,6 +1072,97 @@
             <a:fld id="{F7021451-1387-4CA6-816F-3879F97B5CBC}" type="slidenum">
               <a:rPr lang="en-US"/>
               <a:t>6</a:t>
+            </a:fld>
+            <a:endParaRPr lang="en-US"/>
+          </a:p>
+        </p:txBody>
+      </p:sp>
+    </p:spTree>
+    <p:extLst>
+      <p:ext uri="{BB962C8B-B14F-4D97-AF65-F5344CB8AC3E}">
+        <p14:creationId xmlns:p14="http://schemas.microsoft.com/office/powerpoint/2010/main" val="1024086991"/>
+      </p:ext>
+    </p:extLst>
+  </p:cSld>
+  <p:clrMapOvr>
+    <a:masterClrMapping/>
+  </p:clrMapOvr>
+</p:notes>
+</file>
+
+<file path=ppt/notesSlides/notesSlide7.xml><?xml version="1.0" encoding="utf-8"?>
+<p:notes xmlns:a="http://schemas.openxmlformats.org/drawingml/2006/main" xmlns:r="http://schemas.openxmlformats.org/officeDocument/2006/relationships" xmlns:p="http://schemas.openxmlformats.org/presentationml/2006/main">
+  <p:cSld>
+    <p:spTree>
+      <p:nvGrpSpPr>
+        <p:cNvPr id="1" name=""/>
+        <p:cNvGrpSpPr/>
+        <p:nvPr/>
+      </p:nvGrpSpPr>
+      <p:grpSpPr>
+        <a:xfrm>
+          <a:off x="0" y="0"/>
+          <a:ext cx="0" cy="0"/>
+          <a:chOff x="0" y="0"/>
+          <a:chExt cx="0" cy="0"/>
+        </a:xfrm>
+      </p:grpSpPr>
+      <p:sp>
+        <p:nvSpPr>
+          <p:cNvPr id="2" name="Slide Image Placeholder 1"/>
+          <p:cNvSpPr>
+            <a:spLocks noGrp="1" noRot="1" noChangeAspect="1"/>
+          </p:cNvSpPr>
+          <p:nvPr>
+            <p:ph type="sldImg"/>
+          </p:nvPr>
+        </p:nvSpPr>
+        <p:spPr/>
+        <p:txBody>
+          <a:bodyPr/>
+          <a:lstStyle/>
+          <a:p>
+            <a:endParaRPr lang="en-US"/>
+          </a:p>
+        </p:txBody>
+      </p:sp>
+      <p:sp>
+        <p:nvSpPr>
+          <p:cNvPr id="3" name="Notes Placeholder 2"/>
+          <p:cNvSpPr>
+            <a:spLocks noGrp="1"/>
+          </p:cNvSpPr>
+          <p:nvPr>
+            <p:ph type="body" idx="1"/>
+          </p:nvPr>
+        </p:nvSpPr>
+        <p:spPr/>
+        <p:txBody>
+          <a:bodyPr/>
+          <a:lstStyle/>
+          <a:p>
+            <a:endParaRPr lang="en-US" dirty="0"/>
+          </a:p>
+        </p:txBody>
+      </p:sp>
+      <p:sp>
+        <p:nvSpPr>
+          <p:cNvPr id="4" name="Slide Number Placeholder 3"/>
+          <p:cNvSpPr>
+            <a:spLocks noGrp="1"/>
+          </p:cNvSpPr>
+          <p:nvPr>
+            <p:ph type="sldNum" sz="quarter" idx="10"/>
+          </p:nvPr>
+        </p:nvSpPr>
+        <p:spPr/>
+        <p:txBody>
+          <a:bodyPr/>
+          <a:lstStyle/>
+          <a:p>
+            <a:fld id="{F7021451-1387-4CA6-816F-3879F97B5CBC}" type="slidenum">
+              <a:rPr lang="en-US"/>
+              <a:t>7</a:t>
             </a:fld>
             <a:endParaRPr lang="en-US"/>
           </a:p>
@@ -1060,6 +1495,1848 @@
 
 <file path=ppt/slides/slide1.xml><?xml version="1.0" encoding="utf-8"?>
 <p:sld xmlns:a="http://schemas.openxmlformats.org/drawingml/2006/main" xmlns:r="http://schemas.openxmlformats.org/officeDocument/2006/relationships" xmlns:p="http://schemas.openxmlformats.org/presentationml/2006/main">
+  <p:cSld>
+    <p:bg>
+      <p:bgPr>
+        <a:solidFill>
+          <a:srgbClr val="1A1A1A"/>
+        </a:solidFill>
+        <a:effectLst/>
+      </p:bgPr>
+    </p:bg>
+    <p:spTree>
+      <p:nvGrpSpPr>
+        <p:cNvPr id="1" name=""/>
+        <p:cNvGrpSpPr/>
+        <p:nvPr/>
+      </p:nvGrpSpPr>
+      <p:grpSpPr>
+        <a:xfrm>
+          <a:off x="0" y="0"/>
+          <a:ext cx="0" cy="0"/>
+          <a:chOff x="0" y="0"/>
+          <a:chExt cx="0" cy="0"/>
+        </a:xfrm>
+      </p:grpSpPr>
+      <p:sp>
+        <p:nvSpPr>
+          <p:cNvPr id="2" name="Shape 0"/>
+          <p:cNvSpPr/>
+          <p:nvPr/>
+        </p:nvSpPr>
+        <p:spPr>
+          <a:xfrm>
+            <a:off x="0" y="0"/>
+            <a:ext cx="12161520" cy="73152"/>
+          </a:xfrm>
+          <a:prstGeom prst="rect">
+            <a:avLst/>
+          </a:prstGeom>
+          <a:solidFill>
+            <a:srgbClr val="C8102E"/>
+          </a:solidFill>
+          <a:ln/>
+        </p:spPr>
+        <p:txBody>
+          <a:bodyPr/>
+          <a:lstStyle/>
+          <a:p>
+            <a:pPr marL="0" marR="0" lvl="0" indent="0" algn="l" defTabSz="914400" rtl="0" eaLnBrk="1" fontAlgn="auto" latinLnBrk="0" hangingPunct="1">
+              <a:lnSpc>
+                <a:spcPct val="100000"/>
+              </a:lnSpc>
+              <a:spcBef>
+                <a:spcPts val="0"/>
+              </a:spcBef>
+              <a:spcAft>
+                <a:spcPts val="0"/>
+              </a:spcAft>
+              <a:buClrTx/>
+              <a:buSzTx/>
+              <a:buFontTx/>
+              <a:buNone/>
+              <a:tabLst/>
+              <a:defRPr/>
+            </a:pPr>
+            <a:endParaRPr kumimoji="0" lang="en-US" sz="1800" b="0" i="0" u="none" strike="noStrike" kern="1200" cap="none" spc="0" normalizeH="0" baseline="0" noProof="0">
+              <a:ln>
+                <a:noFill/>
+              </a:ln>
+              <a:solidFill>
+                <a:prstClr val="black"/>
+              </a:solidFill>
+              <a:effectLst/>
+              <a:uLnTx/>
+              <a:uFillTx/>
+              <a:latin typeface="Calibri" panose="020F0502020204030204"/>
+              <a:ea typeface="+mn-ea"/>
+              <a:cs typeface="+mn-cs"/>
+            </a:endParaRPr>
+          </a:p>
+        </p:txBody>
+      </p:sp>
+      <p:sp>
+        <p:nvSpPr>
+          <p:cNvPr id="3" name="Shape 1"/>
+          <p:cNvSpPr/>
+          <p:nvPr/>
+        </p:nvSpPr>
+        <p:spPr>
+          <a:xfrm>
+            <a:off x="0" y="6784848"/>
+            <a:ext cx="12161520" cy="73152"/>
+          </a:xfrm>
+          <a:prstGeom prst="rect">
+            <a:avLst/>
+          </a:prstGeom>
+          <a:solidFill>
+            <a:srgbClr val="D4A017"/>
+          </a:solidFill>
+          <a:ln/>
+        </p:spPr>
+        <p:txBody>
+          <a:bodyPr/>
+          <a:lstStyle/>
+          <a:p>
+            <a:pPr marL="0" marR="0" lvl="0" indent="0" algn="l" defTabSz="914400" rtl="0" eaLnBrk="1" fontAlgn="auto" latinLnBrk="0" hangingPunct="1">
+              <a:lnSpc>
+                <a:spcPct val="100000"/>
+              </a:lnSpc>
+              <a:spcBef>
+                <a:spcPts val="0"/>
+              </a:spcBef>
+              <a:spcAft>
+                <a:spcPts val="0"/>
+              </a:spcAft>
+              <a:buClrTx/>
+              <a:buSzTx/>
+              <a:buFontTx/>
+              <a:buNone/>
+              <a:tabLst/>
+              <a:defRPr/>
+            </a:pPr>
+            <a:endParaRPr kumimoji="0" lang="en-US" sz="1800" b="0" i="0" u="none" strike="noStrike" kern="1200" cap="none" spc="0" normalizeH="0" baseline="0" noProof="0">
+              <a:ln>
+                <a:noFill/>
+              </a:ln>
+              <a:solidFill>
+                <a:prstClr val="black"/>
+              </a:solidFill>
+              <a:effectLst/>
+              <a:uLnTx/>
+              <a:uFillTx/>
+              <a:latin typeface="Calibri" panose="020F0502020204030204"/>
+              <a:ea typeface="+mn-ea"/>
+              <a:cs typeface="+mn-cs"/>
+            </a:endParaRPr>
+          </a:p>
+        </p:txBody>
+      </p:sp>
+      <p:sp>
+        <p:nvSpPr>
+          <p:cNvPr id="4" name="Shape 2"/>
+          <p:cNvSpPr/>
+          <p:nvPr/>
+        </p:nvSpPr>
+        <p:spPr>
+          <a:xfrm>
+            <a:off x="0" y="0"/>
+            <a:ext cx="54864" cy="6858000"/>
+          </a:xfrm>
+          <a:prstGeom prst="rect">
+            <a:avLst/>
+          </a:prstGeom>
+          <a:solidFill>
+            <a:srgbClr val="D4A017"/>
+          </a:solidFill>
+          <a:ln/>
+        </p:spPr>
+        <p:txBody>
+          <a:bodyPr/>
+          <a:lstStyle/>
+          <a:p>
+            <a:pPr marL="0" marR="0" lvl="0" indent="0" algn="l" defTabSz="914400" rtl="0" eaLnBrk="1" fontAlgn="auto" latinLnBrk="0" hangingPunct="1">
+              <a:lnSpc>
+                <a:spcPct val="100000"/>
+              </a:lnSpc>
+              <a:spcBef>
+                <a:spcPts val="0"/>
+              </a:spcBef>
+              <a:spcAft>
+                <a:spcPts val="0"/>
+              </a:spcAft>
+              <a:buClrTx/>
+              <a:buSzTx/>
+              <a:buFontTx/>
+              <a:buNone/>
+              <a:tabLst/>
+              <a:defRPr/>
+            </a:pPr>
+            <a:endParaRPr kumimoji="0" lang="en-US" sz="1800" b="0" i="0" u="none" strike="noStrike" kern="1200" cap="none" spc="0" normalizeH="0" baseline="0" noProof="0">
+              <a:ln>
+                <a:noFill/>
+              </a:ln>
+              <a:solidFill>
+                <a:prstClr val="black"/>
+              </a:solidFill>
+              <a:effectLst/>
+              <a:uLnTx/>
+              <a:uFillTx/>
+              <a:latin typeface="Calibri" panose="020F0502020204030204"/>
+              <a:ea typeface="+mn-ea"/>
+              <a:cs typeface="+mn-cs"/>
+            </a:endParaRPr>
+          </a:p>
+        </p:txBody>
+      </p:sp>
+      <p:sp>
+        <p:nvSpPr>
+          <p:cNvPr id="11" name="Text 9"/>
+          <p:cNvSpPr/>
+          <p:nvPr/>
+        </p:nvSpPr>
+        <p:spPr>
+          <a:xfrm>
+            <a:off x="569166" y="4544008"/>
+            <a:ext cx="4464605" cy="502920"/>
+          </a:xfrm>
+          <a:prstGeom prst="rect">
+            <a:avLst/>
+          </a:prstGeom>
+          <a:noFill/>
+          <a:ln/>
+        </p:spPr>
+        <p:txBody>
+          <a:bodyPr wrap="square" lIns="0" tIns="0" rIns="0" bIns="0" rtlCol="0" anchor="ctr"/>
+          <a:lstStyle/>
+          <a:p>
+            <a:pPr marL="0" marR="0" lvl="0" indent="0" algn="ctr" defTabSz="914400" rtl="0" eaLnBrk="1" fontAlgn="auto" latinLnBrk="0" hangingPunct="1">
+              <a:lnSpc>
+                <a:spcPct val="100000"/>
+              </a:lnSpc>
+              <a:spcBef>
+                <a:spcPts val="0"/>
+              </a:spcBef>
+              <a:spcAft>
+                <a:spcPts val="0"/>
+              </a:spcAft>
+              <a:buClrTx/>
+              <a:buSzTx/>
+              <a:buFontTx/>
+              <a:buNone/>
+              <a:tabLst/>
+              <a:defRPr/>
+            </a:pPr>
+            <a:r>
+              <a:rPr kumimoji="0" lang="en-US" sz="2000" b="1" i="0" u="none" strike="noStrike" kern="0" cap="none" spc="500" normalizeH="0" baseline="0" noProof="0" dirty="0">
+                <a:ln>
+                  <a:noFill/>
+                </a:ln>
+                <a:solidFill>
+                  <a:srgbClr val="C8102E"/>
+                </a:solidFill>
+                <a:effectLst/>
+                <a:uLnTx/>
+                <a:uFillTx/>
+                <a:latin typeface="Arial Black" pitchFamily="34" charset="0"/>
+                <a:ea typeface="Arial Black" pitchFamily="34" charset="-122"/>
+                <a:cs typeface="Arial Black" pitchFamily="34" charset="-120"/>
+              </a:rPr>
+              <a:t>ROYAL  ENFIELD</a:t>
+            </a:r>
+            <a:endParaRPr kumimoji="0" lang="en-US" sz="2000" b="0" i="0" u="none" strike="noStrike" kern="1200" cap="none" spc="0" normalizeH="0" baseline="0" noProof="0" dirty="0">
+              <a:ln>
+                <a:noFill/>
+              </a:ln>
+              <a:solidFill>
+                <a:prstClr val="black"/>
+              </a:solidFill>
+              <a:effectLst/>
+              <a:uLnTx/>
+              <a:uFillTx/>
+              <a:latin typeface="Calibri" panose="020F0502020204030204"/>
+              <a:ea typeface="+mn-ea"/>
+              <a:cs typeface="+mn-cs"/>
+            </a:endParaRPr>
+          </a:p>
+        </p:txBody>
+      </p:sp>
+      <p:sp>
+        <p:nvSpPr>
+          <p:cNvPr id="12" name="Text 10"/>
+          <p:cNvSpPr/>
+          <p:nvPr/>
+        </p:nvSpPr>
+        <p:spPr>
+          <a:xfrm>
+            <a:off x="137160" y="5083316"/>
+            <a:ext cx="4846320" cy="274320"/>
+          </a:xfrm>
+          <a:prstGeom prst="rect">
+            <a:avLst/>
+          </a:prstGeom>
+          <a:noFill/>
+          <a:ln/>
+        </p:spPr>
+        <p:txBody>
+          <a:bodyPr wrap="square" lIns="0" tIns="0" rIns="0" bIns="0" rtlCol="0" anchor="ctr"/>
+          <a:lstStyle/>
+          <a:p>
+            <a:pPr marL="0" marR="0" lvl="0" indent="0" algn="ctr" defTabSz="914400" rtl="0" eaLnBrk="1" fontAlgn="auto" latinLnBrk="0" hangingPunct="1">
+              <a:lnSpc>
+                <a:spcPct val="100000"/>
+              </a:lnSpc>
+              <a:spcBef>
+                <a:spcPts val="0"/>
+              </a:spcBef>
+              <a:spcAft>
+                <a:spcPts val="0"/>
+              </a:spcAft>
+              <a:buClrTx/>
+              <a:buSzTx/>
+              <a:buFontTx/>
+              <a:buNone/>
+              <a:tabLst/>
+              <a:defRPr/>
+            </a:pPr>
+            <a:r>
+              <a:rPr kumimoji="0" lang="en-US" sz="900" b="0" i="1" u="none" strike="noStrike" kern="1200" cap="none" spc="0" normalizeH="0" baseline="0" noProof="0" dirty="0">
+                <a:ln>
+                  <a:noFill/>
+                </a:ln>
+                <a:solidFill>
+                  <a:srgbClr val="666666"/>
+                </a:solidFill>
+                <a:effectLst/>
+                <a:uLnTx/>
+                <a:uFillTx/>
+                <a:latin typeface="Arial" pitchFamily="34" charset="0"/>
+                <a:ea typeface="Arial" pitchFamily="34" charset="-122"/>
+                <a:cs typeface="Arial" pitchFamily="34" charset="-120"/>
+              </a:rPr>
+              <a:t>Since 1901  ·  Pure Motorcycling</a:t>
+            </a:r>
+            <a:endParaRPr kumimoji="0" lang="en-US" sz="900" b="0" i="0" u="none" strike="noStrike" kern="1200" cap="none" spc="0" normalizeH="0" baseline="0" noProof="0" dirty="0">
+              <a:ln>
+                <a:noFill/>
+              </a:ln>
+              <a:solidFill>
+                <a:prstClr val="black"/>
+              </a:solidFill>
+              <a:effectLst/>
+              <a:uLnTx/>
+              <a:uFillTx/>
+              <a:latin typeface="Calibri" panose="020F0502020204030204"/>
+              <a:ea typeface="+mn-ea"/>
+              <a:cs typeface="+mn-cs"/>
+            </a:endParaRPr>
+          </a:p>
+        </p:txBody>
+      </p:sp>
+      <p:sp>
+        <p:nvSpPr>
+          <p:cNvPr id="13" name="Shape 11"/>
+          <p:cNvSpPr/>
+          <p:nvPr/>
+        </p:nvSpPr>
+        <p:spPr>
+          <a:xfrm>
+            <a:off x="5166360" y="411480"/>
+            <a:ext cx="36576" cy="6035040"/>
+          </a:xfrm>
+          <a:prstGeom prst="rect">
+            <a:avLst/>
+          </a:prstGeom>
+          <a:solidFill>
+            <a:srgbClr val="2E2E2E"/>
+          </a:solidFill>
+          <a:ln/>
+        </p:spPr>
+        <p:txBody>
+          <a:bodyPr/>
+          <a:lstStyle/>
+          <a:p>
+            <a:pPr marL="0" marR="0" lvl="0" indent="0" algn="l" defTabSz="914400" rtl="0" eaLnBrk="1" fontAlgn="auto" latinLnBrk="0" hangingPunct="1">
+              <a:lnSpc>
+                <a:spcPct val="100000"/>
+              </a:lnSpc>
+              <a:spcBef>
+                <a:spcPts val="0"/>
+              </a:spcBef>
+              <a:spcAft>
+                <a:spcPts val="0"/>
+              </a:spcAft>
+              <a:buClrTx/>
+              <a:buSzTx/>
+              <a:buFontTx/>
+              <a:buNone/>
+              <a:tabLst/>
+              <a:defRPr/>
+            </a:pPr>
+            <a:endParaRPr kumimoji="0" lang="en-US" sz="1800" b="0" i="0" u="none" strike="noStrike" kern="1200" cap="none" spc="0" normalizeH="0" baseline="0" noProof="0">
+              <a:ln>
+                <a:noFill/>
+              </a:ln>
+              <a:solidFill>
+                <a:prstClr val="black"/>
+              </a:solidFill>
+              <a:effectLst/>
+              <a:uLnTx/>
+              <a:uFillTx/>
+              <a:latin typeface="Calibri" panose="020F0502020204030204"/>
+              <a:ea typeface="+mn-ea"/>
+              <a:cs typeface="+mn-cs"/>
+            </a:endParaRPr>
+          </a:p>
+        </p:txBody>
+      </p:sp>
+      <p:sp>
+        <p:nvSpPr>
+          <p:cNvPr id="14" name="Text 12"/>
+          <p:cNvSpPr/>
+          <p:nvPr/>
+        </p:nvSpPr>
+        <p:spPr>
+          <a:xfrm>
+            <a:off x="5394960" y="502920"/>
+            <a:ext cx="6492240" cy="274320"/>
+          </a:xfrm>
+          <a:prstGeom prst="rect">
+            <a:avLst/>
+          </a:prstGeom>
+          <a:noFill/>
+          <a:ln/>
+        </p:spPr>
+        <p:txBody>
+          <a:bodyPr wrap="square" lIns="0" tIns="0" rIns="0" bIns="0" rtlCol="0" anchor="ctr"/>
+          <a:lstStyle/>
+          <a:p>
+            <a:pPr marL="0" marR="0" lvl="0" indent="0" algn="l" defTabSz="914400" rtl="0" eaLnBrk="1" fontAlgn="auto" latinLnBrk="0" hangingPunct="1">
+              <a:lnSpc>
+                <a:spcPct val="100000"/>
+              </a:lnSpc>
+              <a:spcBef>
+                <a:spcPts val="0"/>
+              </a:spcBef>
+              <a:spcAft>
+                <a:spcPts val="0"/>
+              </a:spcAft>
+              <a:buClrTx/>
+              <a:buSzTx/>
+              <a:buFontTx/>
+              <a:buNone/>
+              <a:tabLst/>
+              <a:defRPr/>
+            </a:pPr>
+            <a:r>
+              <a:rPr kumimoji="0" lang="en-US" sz="900" b="0" i="0" u="none" strike="noStrike" kern="0" cap="none" spc="200" normalizeH="0" baseline="0" noProof="0" dirty="0">
+                <a:ln>
+                  <a:noFill/>
+                </a:ln>
+                <a:solidFill>
+                  <a:srgbClr val="888888"/>
+                </a:solidFill>
+                <a:effectLst/>
+                <a:uLnTx/>
+                <a:uFillTx/>
+                <a:latin typeface="Arial" pitchFamily="34" charset="0"/>
+                <a:ea typeface="Arial" pitchFamily="34" charset="-122"/>
+                <a:cs typeface="Arial" pitchFamily="34" charset="-120"/>
+              </a:rPr>
+              <a:t>DATA SCIENCE  ·  TECHNICAL ASSIGNMENT</a:t>
+            </a:r>
+            <a:endParaRPr kumimoji="0" lang="en-US" sz="900" b="0" i="0" u="none" strike="noStrike" kern="1200" cap="none" spc="0" normalizeH="0" baseline="0" noProof="0" dirty="0">
+              <a:ln>
+                <a:noFill/>
+              </a:ln>
+              <a:solidFill>
+                <a:prstClr val="black"/>
+              </a:solidFill>
+              <a:effectLst/>
+              <a:uLnTx/>
+              <a:uFillTx/>
+              <a:latin typeface="Calibri" panose="020F0502020204030204"/>
+              <a:ea typeface="+mn-ea"/>
+              <a:cs typeface="+mn-cs"/>
+            </a:endParaRPr>
+          </a:p>
+        </p:txBody>
+      </p:sp>
+      <p:sp>
+        <p:nvSpPr>
+          <p:cNvPr id="15" name="Text 13"/>
+          <p:cNvSpPr/>
+          <p:nvPr/>
+        </p:nvSpPr>
+        <p:spPr>
+          <a:xfrm>
+            <a:off x="5394960" y="822960"/>
+            <a:ext cx="6492240" cy="548640"/>
+          </a:xfrm>
+          <a:prstGeom prst="rect">
+            <a:avLst/>
+          </a:prstGeom>
+          <a:noFill/>
+          <a:ln/>
+        </p:spPr>
+        <p:txBody>
+          <a:bodyPr wrap="square" lIns="0" tIns="0" rIns="0" bIns="0" rtlCol="0" anchor="ctr"/>
+          <a:lstStyle/>
+          <a:p>
+            <a:pPr marL="0" marR="0" lvl="0" indent="0" algn="l" defTabSz="914400" rtl="0" eaLnBrk="1" fontAlgn="auto" latinLnBrk="0" hangingPunct="1">
+              <a:lnSpc>
+                <a:spcPct val="100000"/>
+              </a:lnSpc>
+              <a:spcBef>
+                <a:spcPts val="0"/>
+              </a:spcBef>
+              <a:spcAft>
+                <a:spcPts val="0"/>
+              </a:spcAft>
+              <a:buClrTx/>
+              <a:buSzTx/>
+              <a:buFontTx/>
+              <a:buNone/>
+              <a:tabLst/>
+              <a:defRPr/>
+            </a:pPr>
+            <a:r>
+              <a:rPr kumimoji="0" lang="en-US" sz="2400" b="1" i="0" u="none" strike="noStrike" kern="1200" cap="none" spc="0" normalizeH="0" baseline="0" noProof="0" dirty="0">
+                <a:ln>
+                  <a:noFill/>
+                </a:ln>
+                <a:solidFill>
+                  <a:srgbClr val="D4A017"/>
+                </a:solidFill>
+                <a:effectLst/>
+                <a:uLnTx/>
+                <a:uFillTx/>
+                <a:latin typeface="Arial Black" pitchFamily="34" charset="0"/>
+                <a:ea typeface="Arial Black" pitchFamily="34" charset="-122"/>
+                <a:cs typeface="Arial Black" pitchFamily="34" charset="-120"/>
+              </a:rPr>
+              <a:t>Royal Enfield App Review Analysis</a:t>
+            </a:r>
+            <a:endParaRPr kumimoji="0" lang="en-US" sz="2400" b="0" i="0" u="none" strike="noStrike" kern="1200" cap="none" spc="0" normalizeH="0" baseline="0" noProof="0" dirty="0">
+              <a:ln>
+                <a:noFill/>
+              </a:ln>
+              <a:solidFill>
+                <a:prstClr val="black"/>
+              </a:solidFill>
+              <a:effectLst/>
+              <a:uLnTx/>
+              <a:uFillTx/>
+              <a:latin typeface="Calibri" panose="020F0502020204030204"/>
+              <a:ea typeface="+mn-ea"/>
+              <a:cs typeface="+mn-cs"/>
+            </a:endParaRPr>
+          </a:p>
+        </p:txBody>
+      </p:sp>
+      <p:sp>
+        <p:nvSpPr>
+          <p:cNvPr id="16" name="Shape 14"/>
+          <p:cNvSpPr/>
+          <p:nvPr/>
+        </p:nvSpPr>
+        <p:spPr>
+          <a:xfrm>
+            <a:off x="5394960" y="1417320"/>
+            <a:ext cx="6492240" cy="45720"/>
+          </a:xfrm>
+          <a:prstGeom prst="rect">
+            <a:avLst/>
+          </a:prstGeom>
+          <a:solidFill>
+            <a:srgbClr val="C8102E"/>
+          </a:solidFill>
+          <a:ln/>
+        </p:spPr>
+        <p:txBody>
+          <a:bodyPr/>
+          <a:lstStyle/>
+          <a:p>
+            <a:pPr marL="0" marR="0" lvl="0" indent="0" algn="l" defTabSz="914400" rtl="0" eaLnBrk="1" fontAlgn="auto" latinLnBrk="0" hangingPunct="1">
+              <a:lnSpc>
+                <a:spcPct val="100000"/>
+              </a:lnSpc>
+              <a:spcBef>
+                <a:spcPts val="0"/>
+              </a:spcBef>
+              <a:spcAft>
+                <a:spcPts val="0"/>
+              </a:spcAft>
+              <a:buClrTx/>
+              <a:buSzTx/>
+              <a:buFontTx/>
+              <a:buNone/>
+              <a:tabLst/>
+              <a:defRPr/>
+            </a:pPr>
+            <a:endParaRPr kumimoji="0" lang="en-US" sz="1800" b="0" i="0" u="none" strike="noStrike" kern="1200" cap="none" spc="0" normalizeH="0" baseline="0" noProof="0">
+              <a:ln>
+                <a:noFill/>
+              </a:ln>
+              <a:solidFill>
+                <a:prstClr val="black"/>
+              </a:solidFill>
+              <a:effectLst/>
+              <a:uLnTx/>
+              <a:uFillTx/>
+              <a:latin typeface="Calibri" panose="020F0502020204030204"/>
+              <a:ea typeface="+mn-ea"/>
+              <a:cs typeface="+mn-cs"/>
+            </a:endParaRPr>
+          </a:p>
+        </p:txBody>
+      </p:sp>
+      <p:sp>
+        <p:nvSpPr>
+          <p:cNvPr id="17" name="Text 15"/>
+          <p:cNvSpPr/>
+          <p:nvPr/>
+        </p:nvSpPr>
+        <p:spPr>
+          <a:xfrm>
+            <a:off x="5394960" y="1508760"/>
+            <a:ext cx="6492240" cy="274320"/>
+          </a:xfrm>
+          <a:prstGeom prst="rect">
+            <a:avLst/>
+          </a:prstGeom>
+          <a:noFill/>
+          <a:ln/>
+        </p:spPr>
+        <p:txBody>
+          <a:bodyPr wrap="square" lIns="0" tIns="0" rIns="0" bIns="0" rtlCol="0" anchor="ctr"/>
+          <a:lstStyle/>
+          <a:p>
+            <a:pPr marL="0" marR="0" lvl="0" indent="0" algn="l" defTabSz="914400" rtl="0" eaLnBrk="1" fontAlgn="auto" latinLnBrk="0" hangingPunct="1">
+              <a:lnSpc>
+                <a:spcPct val="100000"/>
+              </a:lnSpc>
+              <a:spcBef>
+                <a:spcPts val="0"/>
+              </a:spcBef>
+              <a:spcAft>
+                <a:spcPts val="0"/>
+              </a:spcAft>
+              <a:buClrTx/>
+              <a:buSzTx/>
+              <a:buFontTx/>
+              <a:buNone/>
+              <a:tabLst/>
+              <a:defRPr/>
+            </a:pPr>
+            <a:r>
+              <a:rPr kumimoji="0" lang="en-US" sz="950" b="0" i="1" u="none" strike="noStrike" kern="1200" cap="none" spc="0" normalizeH="0" baseline="0" noProof="0" dirty="0">
+                <a:ln>
+                  <a:noFill/>
+                </a:ln>
+                <a:solidFill>
+                  <a:srgbClr val="777777"/>
+                </a:solidFill>
+                <a:effectLst/>
+                <a:uLnTx/>
+                <a:uFillTx/>
+                <a:latin typeface="Arial" pitchFamily="34" charset="0"/>
+                <a:ea typeface="Arial" pitchFamily="34" charset="-122"/>
+                <a:cs typeface="Arial" pitchFamily="34" charset="-120"/>
+              </a:rPr>
+              <a:t>L1/L2 User Intent Analysis  ·  NLP Pipeline  ·  2,543 Reviews</a:t>
+            </a:r>
+            <a:endParaRPr kumimoji="0" lang="en-US" sz="950" b="0" i="0" u="none" strike="noStrike" kern="1200" cap="none" spc="0" normalizeH="0" baseline="0" noProof="0" dirty="0">
+              <a:ln>
+                <a:noFill/>
+              </a:ln>
+              <a:solidFill>
+                <a:prstClr val="black"/>
+              </a:solidFill>
+              <a:effectLst/>
+              <a:uLnTx/>
+              <a:uFillTx/>
+              <a:latin typeface="Calibri" panose="020F0502020204030204"/>
+              <a:ea typeface="+mn-ea"/>
+              <a:cs typeface="+mn-cs"/>
+            </a:endParaRPr>
+          </a:p>
+        </p:txBody>
+      </p:sp>
+      <p:sp>
+        <p:nvSpPr>
+          <p:cNvPr id="18" name="Text 16"/>
+          <p:cNvSpPr/>
+          <p:nvPr/>
+        </p:nvSpPr>
+        <p:spPr>
+          <a:xfrm>
+            <a:off x="5394960" y="1938528"/>
+            <a:ext cx="6492240" cy="749808"/>
+          </a:xfrm>
+          <a:prstGeom prst="rect">
+            <a:avLst/>
+          </a:prstGeom>
+          <a:noFill/>
+          <a:ln/>
+        </p:spPr>
+        <p:txBody>
+          <a:bodyPr wrap="square" lIns="0" tIns="0" rIns="0" bIns="0" rtlCol="0" anchor="ctr"/>
+          <a:lstStyle/>
+          <a:p>
+            <a:pPr marL="0" marR="0" lvl="0" indent="0" algn="l" defTabSz="914400" rtl="0" eaLnBrk="1" fontAlgn="auto" latinLnBrk="0" hangingPunct="1">
+              <a:lnSpc>
+                <a:spcPct val="100000"/>
+              </a:lnSpc>
+              <a:spcBef>
+                <a:spcPts val="0"/>
+              </a:spcBef>
+              <a:spcAft>
+                <a:spcPts val="0"/>
+              </a:spcAft>
+              <a:buClrTx/>
+              <a:buSzTx/>
+              <a:buFontTx/>
+              <a:buNone/>
+              <a:tabLst/>
+              <a:defRPr/>
+            </a:pPr>
+            <a:r>
+              <a:rPr kumimoji="0" lang="en-US" sz="3600" b="1" i="0" u="none" strike="noStrike" kern="1200" cap="none" spc="0" normalizeH="0" baseline="0" noProof="0" dirty="0">
+                <a:ln>
+                  <a:noFill/>
+                </a:ln>
+                <a:solidFill>
+                  <a:srgbClr val="FFFFFF"/>
+                </a:solidFill>
+                <a:effectLst/>
+                <a:uLnTx/>
+                <a:uFillTx/>
+                <a:latin typeface="Arial Black" pitchFamily="34" charset="0"/>
+                <a:ea typeface="Arial Black" pitchFamily="34" charset="-122"/>
+                <a:cs typeface="Arial Black" pitchFamily="34" charset="-120"/>
+              </a:rPr>
+              <a:t>Muthukumaran P</a:t>
+            </a:r>
+            <a:endParaRPr kumimoji="0" lang="en-US" sz="3600" b="0" i="0" u="none" strike="noStrike" kern="1200" cap="none" spc="0" normalizeH="0" baseline="0" noProof="0" dirty="0">
+              <a:ln>
+                <a:noFill/>
+              </a:ln>
+              <a:solidFill>
+                <a:prstClr val="black"/>
+              </a:solidFill>
+              <a:effectLst/>
+              <a:uLnTx/>
+              <a:uFillTx/>
+              <a:latin typeface="Calibri" panose="020F0502020204030204"/>
+              <a:ea typeface="+mn-ea"/>
+              <a:cs typeface="+mn-cs"/>
+            </a:endParaRPr>
+          </a:p>
+        </p:txBody>
+      </p:sp>
+      <p:sp>
+        <p:nvSpPr>
+          <p:cNvPr id="19" name="Shape 17"/>
+          <p:cNvSpPr/>
+          <p:nvPr/>
+        </p:nvSpPr>
+        <p:spPr>
+          <a:xfrm>
+            <a:off x="5394960" y="2761488"/>
+            <a:ext cx="2286000" cy="384048"/>
+          </a:xfrm>
+          <a:prstGeom prst="rect">
+            <a:avLst/>
+          </a:prstGeom>
+          <a:solidFill>
+            <a:srgbClr val="C8102E"/>
+          </a:solidFill>
+          <a:ln/>
+        </p:spPr>
+        <p:txBody>
+          <a:bodyPr/>
+          <a:lstStyle/>
+          <a:p>
+            <a:pPr marL="0" marR="0" lvl="0" indent="0" algn="l" defTabSz="914400" rtl="0" eaLnBrk="1" fontAlgn="auto" latinLnBrk="0" hangingPunct="1">
+              <a:lnSpc>
+                <a:spcPct val="100000"/>
+              </a:lnSpc>
+              <a:spcBef>
+                <a:spcPts val="0"/>
+              </a:spcBef>
+              <a:spcAft>
+                <a:spcPts val="0"/>
+              </a:spcAft>
+              <a:buClrTx/>
+              <a:buSzTx/>
+              <a:buFontTx/>
+              <a:buNone/>
+              <a:tabLst/>
+              <a:defRPr/>
+            </a:pPr>
+            <a:endParaRPr kumimoji="0" lang="en-US" sz="1800" b="0" i="0" u="none" strike="noStrike" kern="1200" cap="none" spc="0" normalizeH="0" baseline="0" noProof="0">
+              <a:ln>
+                <a:noFill/>
+              </a:ln>
+              <a:solidFill>
+                <a:prstClr val="black"/>
+              </a:solidFill>
+              <a:effectLst/>
+              <a:uLnTx/>
+              <a:uFillTx/>
+              <a:latin typeface="Calibri" panose="020F0502020204030204"/>
+              <a:ea typeface="+mn-ea"/>
+              <a:cs typeface="+mn-cs"/>
+            </a:endParaRPr>
+          </a:p>
+        </p:txBody>
+      </p:sp>
+      <p:sp>
+        <p:nvSpPr>
+          <p:cNvPr id="20" name="Text 18"/>
+          <p:cNvSpPr/>
+          <p:nvPr/>
+        </p:nvSpPr>
+        <p:spPr>
+          <a:xfrm>
+            <a:off x="5394960" y="2761488"/>
+            <a:ext cx="2286000" cy="384048"/>
+          </a:xfrm>
+          <a:prstGeom prst="rect">
+            <a:avLst/>
+          </a:prstGeom>
+          <a:noFill/>
+          <a:ln/>
+        </p:spPr>
+        <p:txBody>
+          <a:bodyPr wrap="square" lIns="0" tIns="0" rIns="0" bIns="0" rtlCol="0" anchor="ctr"/>
+          <a:lstStyle/>
+          <a:p>
+            <a:pPr marL="0" marR="0" lvl="0" indent="0" algn="ctr" defTabSz="914400" rtl="0" eaLnBrk="1" fontAlgn="auto" latinLnBrk="0" hangingPunct="1">
+              <a:lnSpc>
+                <a:spcPct val="100000"/>
+              </a:lnSpc>
+              <a:spcBef>
+                <a:spcPts val="0"/>
+              </a:spcBef>
+              <a:spcAft>
+                <a:spcPts val="0"/>
+              </a:spcAft>
+              <a:buClrTx/>
+              <a:buSzTx/>
+              <a:buFontTx/>
+              <a:buNone/>
+              <a:tabLst/>
+              <a:defRPr/>
+            </a:pPr>
+            <a:r>
+              <a:rPr kumimoji="0" lang="en-US" sz="1300" b="1" i="0" u="none" strike="noStrike" kern="1200" cap="none" spc="0" normalizeH="0" baseline="0" noProof="0" dirty="0">
+                <a:ln>
+                  <a:noFill/>
+                </a:ln>
+                <a:solidFill>
+                  <a:srgbClr val="FFFFFF"/>
+                </a:solidFill>
+                <a:effectLst/>
+                <a:uLnTx/>
+                <a:uFillTx/>
+                <a:latin typeface="Arial" pitchFamily="34" charset="0"/>
+                <a:ea typeface="Arial" pitchFamily="34" charset="-122"/>
+                <a:cs typeface="Arial" pitchFamily="34" charset="-120"/>
+              </a:rPr>
+              <a:t>Data Scientist</a:t>
+            </a:r>
+            <a:endParaRPr kumimoji="0" lang="en-US" sz="1300" b="0" i="0" u="none" strike="noStrike" kern="1200" cap="none" spc="0" normalizeH="0" baseline="0" noProof="0" dirty="0">
+              <a:ln>
+                <a:noFill/>
+              </a:ln>
+              <a:solidFill>
+                <a:prstClr val="black"/>
+              </a:solidFill>
+              <a:effectLst/>
+              <a:uLnTx/>
+              <a:uFillTx/>
+              <a:latin typeface="Calibri" panose="020F0502020204030204"/>
+              <a:ea typeface="+mn-ea"/>
+              <a:cs typeface="+mn-cs"/>
+            </a:endParaRPr>
+          </a:p>
+        </p:txBody>
+      </p:sp>
+      <p:sp>
+        <p:nvSpPr>
+          <p:cNvPr id="21" name="Shape 19"/>
+          <p:cNvSpPr/>
+          <p:nvPr/>
+        </p:nvSpPr>
+        <p:spPr>
+          <a:xfrm>
+            <a:off x="5394960" y="3310128"/>
+            <a:ext cx="6492240" cy="18288"/>
+          </a:xfrm>
+          <a:prstGeom prst="rect">
+            <a:avLst/>
+          </a:prstGeom>
+          <a:solidFill>
+            <a:srgbClr val="2A2A2A"/>
+          </a:solidFill>
+          <a:ln/>
+        </p:spPr>
+        <p:txBody>
+          <a:bodyPr/>
+          <a:lstStyle/>
+          <a:p>
+            <a:pPr marL="0" marR="0" lvl="0" indent="0" algn="l" defTabSz="914400" rtl="0" eaLnBrk="1" fontAlgn="auto" latinLnBrk="0" hangingPunct="1">
+              <a:lnSpc>
+                <a:spcPct val="100000"/>
+              </a:lnSpc>
+              <a:spcBef>
+                <a:spcPts val="0"/>
+              </a:spcBef>
+              <a:spcAft>
+                <a:spcPts val="0"/>
+              </a:spcAft>
+              <a:buClrTx/>
+              <a:buSzTx/>
+              <a:buFontTx/>
+              <a:buNone/>
+              <a:tabLst/>
+              <a:defRPr/>
+            </a:pPr>
+            <a:endParaRPr kumimoji="0" lang="en-US" sz="1800" b="0" i="0" u="none" strike="noStrike" kern="1200" cap="none" spc="0" normalizeH="0" baseline="0" noProof="0">
+              <a:ln>
+                <a:noFill/>
+              </a:ln>
+              <a:solidFill>
+                <a:prstClr val="black"/>
+              </a:solidFill>
+              <a:effectLst/>
+              <a:uLnTx/>
+              <a:uFillTx/>
+              <a:latin typeface="Calibri" panose="020F0502020204030204"/>
+              <a:ea typeface="+mn-ea"/>
+              <a:cs typeface="+mn-cs"/>
+            </a:endParaRPr>
+          </a:p>
+        </p:txBody>
+      </p:sp>
+      <p:sp>
+        <p:nvSpPr>
+          <p:cNvPr id="22" name="Shape 20"/>
+          <p:cNvSpPr/>
+          <p:nvPr/>
+        </p:nvSpPr>
+        <p:spPr>
+          <a:xfrm>
+            <a:off x="5394960" y="3438144"/>
+            <a:ext cx="402336" cy="402336"/>
+          </a:xfrm>
+          <a:prstGeom prst="rect">
+            <a:avLst/>
+          </a:prstGeom>
+          <a:solidFill>
+            <a:srgbClr val="C8102E"/>
+          </a:solidFill>
+          <a:ln/>
+        </p:spPr>
+        <p:txBody>
+          <a:bodyPr/>
+          <a:lstStyle/>
+          <a:p>
+            <a:pPr marL="0" marR="0" lvl="0" indent="0" algn="l" defTabSz="914400" rtl="0" eaLnBrk="1" fontAlgn="auto" latinLnBrk="0" hangingPunct="1">
+              <a:lnSpc>
+                <a:spcPct val="100000"/>
+              </a:lnSpc>
+              <a:spcBef>
+                <a:spcPts val="0"/>
+              </a:spcBef>
+              <a:spcAft>
+                <a:spcPts val="0"/>
+              </a:spcAft>
+              <a:buClrTx/>
+              <a:buSzTx/>
+              <a:buFontTx/>
+              <a:buNone/>
+              <a:tabLst/>
+              <a:defRPr/>
+            </a:pPr>
+            <a:endParaRPr kumimoji="0" lang="en-US" sz="1800" b="0" i="0" u="none" strike="noStrike" kern="1200" cap="none" spc="0" normalizeH="0" baseline="0" noProof="0">
+              <a:ln>
+                <a:noFill/>
+              </a:ln>
+              <a:solidFill>
+                <a:prstClr val="black"/>
+              </a:solidFill>
+              <a:effectLst/>
+              <a:uLnTx/>
+              <a:uFillTx/>
+              <a:latin typeface="Calibri" panose="020F0502020204030204"/>
+              <a:ea typeface="+mn-ea"/>
+              <a:cs typeface="+mn-cs"/>
+            </a:endParaRPr>
+          </a:p>
+        </p:txBody>
+      </p:sp>
+      <p:sp>
+        <p:nvSpPr>
+          <p:cNvPr id="23" name="Text 21"/>
+          <p:cNvSpPr/>
+          <p:nvPr/>
+        </p:nvSpPr>
+        <p:spPr>
+          <a:xfrm>
+            <a:off x="5394960" y="3438144"/>
+            <a:ext cx="402336" cy="402336"/>
+          </a:xfrm>
+          <a:prstGeom prst="rect">
+            <a:avLst/>
+          </a:prstGeom>
+          <a:noFill/>
+          <a:ln/>
+        </p:spPr>
+        <p:txBody>
+          <a:bodyPr wrap="square" lIns="0" tIns="0" rIns="0" bIns="0" rtlCol="0" anchor="ctr"/>
+          <a:lstStyle/>
+          <a:p>
+            <a:pPr marL="0" marR="0" lvl="0" indent="0" algn="ctr" defTabSz="914400" rtl="0" eaLnBrk="1" fontAlgn="auto" latinLnBrk="0" hangingPunct="1">
+              <a:lnSpc>
+                <a:spcPct val="100000"/>
+              </a:lnSpc>
+              <a:spcBef>
+                <a:spcPts val="0"/>
+              </a:spcBef>
+              <a:spcAft>
+                <a:spcPts val="0"/>
+              </a:spcAft>
+              <a:buClrTx/>
+              <a:buSzTx/>
+              <a:buFontTx/>
+              <a:buNone/>
+              <a:tabLst/>
+              <a:defRPr/>
+            </a:pPr>
+            <a:r>
+              <a:rPr kumimoji="0" lang="en-US" sz="1400" b="1" i="0" u="none" strike="noStrike" kern="1200" cap="none" spc="0" normalizeH="0" baseline="0" noProof="0" dirty="0">
+                <a:ln>
+                  <a:noFill/>
+                </a:ln>
+                <a:solidFill>
+                  <a:srgbClr val="FFFFFF"/>
+                </a:solidFill>
+                <a:effectLst/>
+                <a:uLnTx/>
+                <a:uFillTx/>
+                <a:latin typeface="Arial" pitchFamily="34" charset="0"/>
+                <a:ea typeface="Arial" pitchFamily="34" charset="-122"/>
+                <a:cs typeface="Arial" pitchFamily="34" charset="-120"/>
+              </a:rPr>
+              <a:t>@</a:t>
+            </a:r>
+            <a:endParaRPr kumimoji="0" lang="en-US" sz="1400" b="0" i="0" u="none" strike="noStrike" kern="1200" cap="none" spc="0" normalizeH="0" baseline="0" noProof="0" dirty="0">
+              <a:ln>
+                <a:noFill/>
+              </a:ln>
+              <a:solidFill>
+                <a:prstClr val="black"/>
+              </a:solidFill>
+              <a:effectLst/>
+              <a:uLnTx/>
+              <a:uFillTx/>
+              <a:latin typeface="Calibri" panose="020F0502020204030204"/>
+              <a:ea typeface="+mn-ea"/>
+              <a:cs typeface="+mn-cs"/>
+            </a:endParaRPr>
+          </a:p>
+        </p:txBody>
+      </p:sp>
+      <p:sp>
+        <p:nvSpPr>
+          <p:cNvPr id="24" name="Text 22"/>
+          <p:cNvSpPr/>
+          <p:nvPr/>
+        </p:nvSpPr>
+        <p:spPr>
+          <a:xfrm>
+            <a:off x="5888736" y="3456432"/>
+            <a:ext cx="5989320" cy="402336"/>
+          </a:xfrm>
+          <a:prstGeom prst="rect">
+            <a:avLst/>
+          </a:prstGeom>
+          <a:noFill/>
+          <a:ln/>
+        </p:spPr>
+        <p:txBody>
+          <a:bodyPr wrap="square" lIns="0" tIns="0" rIns="0" bIns="0" rtlCol="0" anchor="ctr"/>
+          <a:lstStyle/>
+          <a:p>
+            <a:pPr marL="0" marR="0" lvl="0" indent="0" algn="l" defTabSz="914400" rtl="0" eaLnBrk="1" fontAlgn="auto" latinLnBrk="0" hangingPunct="1">
+              <a:lnSpc>
+                <a:spcPct val="100000"/>
+              </a:lnSpc>
+              <a:spcBef>
+                <a:spcPts val="0"/>
+              </a:spcBef>
+              <a:spcAft>
+                <a:spcPts val="0"/>
+              </a:spcAft>
+              <a:buClrTx/>
+              <a:buSzTx/>
+              <a:buFontTx/>
+              <a:buNone/>
+              <a:tabLst/>
+              <a:defRPr/>
+            </a:pPr>
+            <a:r>
+              <a:rPr kumimoji="0" lang="en-US" sz="1300" b="0" i="0" u="none" strike="noStrike" kern="1200" cap="none" spc="0" normalizeH="0" baseline="0" noProof="0" dirty="0">
+                <a:ln>
+                  <a:noFill/>
+                </a:ln>
+                <a:solidFill>
+                  <a:srgbClr val="CCCCCC"/>
+                </a:solidFill>
+                <a:effectLst/>
+                <a:uLnTx/>
+                <a:uFillTx/>
+                <a:latin typeface="Arial" pitchFamily="34" charset="0"/>
+                <a:ea typeface="Arial" pitchFamily="34" charset="-122"/>
+                <a:cs typeface="Arial" pitchFamily="34" charset="-120"/>
+              </a:rPr>
+              <a:t>muthuwr1998@gmail.com</a:t>
+            </a:r>
+            <a:endParaRPr kumimoji="0" lang="en-US" sz="1300" b="0" i="0" u="none" strike="noStrike" kern="1200" cap="none" spc="0" normalizeH="0" baseline="0" noProof="0" dirty="0">
+              <a:ln>
+                <a:noFill/>
+              </a:ln>
+              <a:solidFill>
+                <a:prstClr val="black"/>
+              </a:solidFill>
+              <a:effectLst/>
+              <a:uLnTx/>
+              <a:uFillTx/>
+              <a:latin typeface="Calibri" panose="020F0502020204030204"/>
+              <a:ea typeface="+mn-ea"/>
+              <a:cs typeface="+mn-cs"/>
+            </a:endParaRPr>
+          </a:p>
+        </p:txBody>
+      </p:sp>
+      <p:sp>
+        <p:nvSpPr>
+          <p:cNvPr id="25" name="Shape 23"/>
+          <p:cNvSpPr/>
+          <p:nvPr/>
+        </p:nvSpPr>
+        <p:spPr>
+          <a:xfrm>
+            <a:off x="5394960" y="4096512"/>
+            <a:ext cx="402336" cy="402336"/>
+          </a:xfrm>
+          <a:prstGeom prst="rect">
+            <a:avLst/>
+          </a:prstGeom>
+          <a:solidFill>
+            <a:srgbClr val="C8102E"/>
+          </a:solidFill>
+          <a:ln/>
+        </p:spPr>
+        <p:txBody>
+          <a:bodyPr/>
+          <a:lstStyle/>
+          <a:p>
+            <a:pPr marL="0" marR="0" lvl="0" indent="0" algn="l" defTabSz="914400" rtl="0" eaLnBrk="1" fontAlgn="auto" latinLnBrk="0" hangingPunct="1">
+              <a:lnSpc>
+                <a:spcPct val="100000"/>
+              </a:lnSpc>
+              <a:spcBef>
+                <a:spcPts val="0"/>
+              </a:spcBef>
+              <a:spcAft>
+                <a:spcPts val="0"/>
+              </a:spcAft>
+              <a:buClrTx/>
+              <a:buSzTx/>
+              <a:buFontTx/>
+              <a:buNone/>
+              <a:tabLst/>
+              <a:defRPr/>
+            </a:pPr>
+            <a:endParaRPr kumimoji="0" lang="en-US" sz="1800" b="0" i="0" u="none" strike="noStrike" kern="1200" cap="none" spc="0" normalizeH="0" baseline="0" noProof="0">
+              <a:ln>
+                <a:noFill/>
+              </a:ln>
+              <a:solidFill>
+                <a:prstClr val="black"/>
+              </a:solidFill>
+              <a:effectLst/>
+              <a:uLnTx/>
+              <a:uFillTx/>
+              <a:latin typeface="Calibri" panose="020F0502020204030204"/>
+              <a:ea typeface="+mn-ea"/>
+              <a:cs typeface="+mn-cs"/>
+            </a:endParaRPr>
+          </a:p>
+        </p:txBody>
+      </p:sp>
+      <p:sp>
+        <p:nvSpPr>
+          <p:cNvPr id="26" name="Text 24"/>
+          <p:cNvSpPr/>
+          <p:nvPr/>
+        </p:nvSpPr>
+        <p:spPr>
+          <a:xfrm>
+            <a:off x="5394960" y="4096512"/>
+            <a:ext cx="402336" cy="402336"/>
+          </a:xfrm>
+          <a:prstGeom prst="rect">
+            <a:avLst/>
+          </a:prstGeom>
+          <a:noFill/>
+          <a:ln/>
+        </p:spPr>
+        <p:txBody>
+          <a:bodyPr wrap="square" lIns="0" tIns="0" rIns="0" bIns="0" rtlCol="0" anchor="ctr"/>
+          <a:lstStyle/>
+          <a:p>
+            <a:pPr marL="0" marR="0" lvl="0" indent="0" algn="ctr" defTabSz="914400" rtl="0" eaLnBrk="1" fontAlgn="auto" latinLnBrk="0" hangingPunct="1">
+              <a:lnSpc>
+                <a:spcPct val="100000"/>
+              </a:lnSpc>
+              <a:spcBef>
+                <a:spcPts val="0"/>
+              </a:spcBef>
+              <a:spcAft>
+                <a:spcPts val="0"/>
+              </a:spcAft>
+              <a:buClrTx/>
+              <a:buSzTx/>
+              <a:buFontTx/>
+              <a:buNone/>
+              <a:tabLst/>
+              <a:defRPr/>
+            </a:pPr>
+            <a:r>
+              <a:rPr kumimoji="0" lang="en-US" sz="1400" b="1" i="0" u="none" strike="noStrike" kern="1200" cap="none" spc="0" normalizeH="0" baseline="0" noProof="0" dirty="0">
+                <a:ln>
+                  <a:noFill/>
+                </a:ln>
+                <a:solidFill>
+                  <a:srgbClr val="FFFFFF"/>
+                </a:solidFill>
+                <a:effectLst/>
+                <a:uLnTx/>
+                <a:uFillTx/>
+                <a:latin typeface="Arial" pitchFamily="34" charset="0"/>
+                <a:ea typeface="Arial" pitchFamily="34" charset="-122"/>
+                <a:cs typeface="Arial" pitchFamily="34" charset="-120"/>
+              </a:rPr>
+              <a:t>P</a:t>
+            </a:r>
+            <a:endParaRPr kumimoji="0" lang="en-US" sz="1400" b="0" i="0" u="none" strike="noStrike" kern="1200" cap="none" spc="0" normalizeH="0" baseline="0" noProof="0" dirty="0">
+              <a:ln>
+                <a:noFill/>
+              </a:ln>
+              <a:solidFill>
+                <a:prstClr val="black"/>
+              </a:solidFill>
+              <a:effectLst/>
+              <a:uLnTx/>
+              <a:uFillTx/>
+              <a:latin typeface="Calibri" panose="020F0502020204030204"/>
+              <a:ea typeface="+mn-ea"/>
+              <a:cs typeface="+mn-cs"/>
+            </a:endParaRPr>
+          </a:p>
+        </p:txBody>
+      </p:sp>
+      <p:sp>
+        <p:nvSpPr>
+          <p:cNvPr id="27" name="Text 25"/>
+          <p:cNvSpPr/>
+          <p:nvPr/>
+        </p:nvSpPr>
+        <p:spPr>
+          <a:xfrm>
+            <a:off x="5888736" y="4114800"/>
+            <a:ext cx="5989320" cy="402336"/>
+          </a:xfrm>
+          <a:prstGeom prst="rect">
+            <a:avLst/>
+          </a:prstGeom>
+          <a:noFill/>
+          <a:ln/>
+        </p:spPr>
+        <p:txBody>
+          <a:bodyPr wrap="square" lIns="0" tIns="0" rIns="0" bIns="0" rtlCol="0" anchor="ctr"/>
+          <a:lstStyle/>
+          <a:p>
+            <a:pPr marL="0" marR="0" lvl="0" indent="0" algn="l" defTabSz="914400" rtl="0" eaLnBrk="1" fontAlgn="auto" latinLnBrk="0" hangingPunct="1">
+              <a:lnSpc>
+                <a:spcPct val="100000"/>
+              </a:lnSpc>
+              <a:spcBef>
+                <a:spcPts val="0"/>
+              </a:spcBef>
+              <a:spcAft>
+                <a:spcPts val="0"/>
+              </a:spcAft>
+              <a:buClrTx/>
+              <a:buSzTx/>
+              <a:buFontTx/>
+              <a:buNone/>
+              <a:tabLst/>
+              <a:defRPr/>
+            </a:pPr>
+            <a:r>
+              <a:rPr kumimoji="0" lang="en-US" sz="1300" b="0" i="0" u="none" strike="noStrike" kern="1200" cap="none" spc="0" normalizeH="0" baseline="0" noProof="0" dirty="0">
+                <a:ln>
+                  <a:noFill/>
+                </a:ln>
+                <a:solidFill>
+                  <a:srgbClr val="CCCCCC"/>
+                </a:solidFill>
+                <a:effectLst/>
+                <a:uLnTx/>
+                <a:uFillTx/>
+                <a:latin typeface="Arial" pitchFamily="34" charset="0"/>
+                <a:ea typeface="Arial" pitchFamily="34" charset="-122"/>
+                <a:cs typeface="Arial" pitchFamily="34" charset="-120"/>
+              </a:rPr>
+              <a:t>+91  80562  15416</a:t>
+            </a:r>
+            <a:endParaRPr kumimoji="0" lang="en-US" sz="1300" b="0" i="0" u="none" strike="noStrike" kern="1200" cap="none" spc="0" normalizeH="0" baseline="0" noProof="0" dirty="0">
+              <a:ln>
+                <a:noFill/>
+              </a:ln>
+              <a:solidFill>
+                <a:prstClr val="black"/>
+              </a:solidFill>
+              <a:effectLst/>
+              <a:uLnTx/>
+              <a:uFillTx/>
+              <a:latin typeface="Calibri" panose="020F0502020204030204"/>
+              <a:ea typeface="+mn-ea"/>
+              <a:cs typeface="+mn-cs"/>
+            </a:endParaRPr>
+          </a:p>
+        </p:txBody>
+      </p:sp>
+      <p:sp>
+        <p:nvSpPr>
+          <p:cNvPr id="28" name="Shape 26"/>
+          <p:cNvSpPr/>
+          <p:nvPr/>
+        </p:nvSpPr>
+        <p:spPr>
+          <a:xfrm>
+            <a:off x="5394960" y="4754880"/>
+            <a:ext cx="402336" cy="402336"/>
+          </a:xfrm>
+          <a:prstGeom prst="rect">
+            <a:avLst/>
+          </a:prstGeom>
+          <a:solidFill>
+            <a:srgbClr val="C8102E"/>
+          </a:solidFill>
+          <a:ln/>
+        </p:spPr>
+        <p:txBody>
+          <a:bodyPr/>
+          <a:lstStyle/>
+          <a:p>
+            <a:pPr marL="0" marR="0" lvl="0" indent="0" algn="l" defTabSz="914400" rtl="0" eaLnBrk="1" fontAlgn="auto" latinLnBrk="0" hangingPunct="1">
+              <a:lnSpc>
+                <a:spcPct val="100000"/>
+              </a:lnSpc>
+              <a:spcBef>
+                <a:spcPts val="0"/>
+              </a:spcBef>
+              <a:spcAft>
+                <a:spcPts val="0"/>
+              </a:spcAft>
+              <a:buClrTx/>
+              <a:buSzTx/>
+              <a:buFontTx/>
+              <a:buNone/>
+              <a:tabLst/>
+              <a:defRPr/>
+            </a:pPr>
+            <a:endParaRPr kumimoji="0" lang="en-US" sz="1800" b="0" i="0" u="none" strike="noStrike" kern="1200" cap="none" spc="0" normalizeH="0" baseline="0" noProof="0">
+              <a:ln>
+                <a:noFill/>
+              </a:ln>
+              <a:solidFill>
+                <a:prstClr val="black"/>
+              </a:solidFill>
+              <a:effectLst/>
+              <a:uLnTx/>
+              <a:uFillTx/>
+              <a:latin typeface="Calibri" panose="020F0502020204030204"/>
+              <a:ea typeface="+mn-ea"/>
+              <a:cs typeface="+mn-cs"/>
+            </a:endParaRPr>
+          </a:p>
+        </p:txBody>
+      </p:sp>
+      <p:sp>
+        <p:nvSpPr>
+          <p:cNvPr id="29" name="Text 27"/>
+          <p:cNvSpPr/>
+          <p:nvPr/>
+        </p:nvSpPr>
+        <p:spPr>
+          <a:xfrm>
+            <a:off x="5394960" y="4754880"/>
+            <a:ext cx="402336" cy="402336"/>
+          </a:xfrm>
+          <a:prstGeom prst="rect">
+            <a:avLst/>
+          </a:prstGeom>
+          <a:noFill/>
+          <a:ln/>
+        </p:spPr>
+        <p:txBody>
+          <a:bodyPr wrap="square" lIns="0" tIns="0" rIns="0" bIns="0" rtlCol="0" anchor="ctr"/>
+          <a:lstStyle/>
+          <a:p>
+            <a:pPr marL="0" marR="0" lvl="0" indent="0" algn="ctr" defTabSz="914400" rtl="0" eaLnBrk="1" fontAlgn="auto" latinLnBrk="0" hangingPunct="1">
+              <a:lnSpc>
+                <a:spcPct val="100000"/>
+              </a:lnSpc>
+              <a:spcBef>
+                <a:spcPts val="0"/>
+              </a:spcBef>
+              <a:spcAft>
+                <a:spcPts val="0"/>
+              </a:spcAft>
+              <a:buClrTx/>
+              <a:buSzTx/>
+              <a:buFontTx/>
+              <a:buNone/>
+              <a:tabLst/>
+              <a:defRPr/>
+            </a:pPr>
+            <a:r>
+              <a:rPr kumimoji="0" lang="en-US" sz="900" b="1" i="0" u="none" strike="noStrike" kern="1200" cap="none" spc="0" normalizeH="0" baseline="0" noProof="0" dirty="0">
+                <a:ln>
+                  <a:noFill/>
+                </a:ln>
+                <a:solidFill>
+                  <a:srgbClr val="FFFFFF"/>
+                </a:solidFill>
+                <a:effectLst/>
+                <a:uLnTx/>
+                <a:uFillTx/>
+                <a:latin typeface="Arial" pitchFamily="34" charset="0"/>
+                <a:ea typeface="Arial" pitchFamily="34" charset="-122"/>
+                <a:cs typeface="Arial" pitchFamily="34" charset="-120"/>
+              </a:rPr>
+              <a:t>GH</a:t>
+            </a:r>
+            <a:endParaRPr kumimoji="0" lang="en-US" sz="900" b="0" i="0" u="none" strike="noStrike" kern="1200" cap="none" spc="0" normalizeH="0" baseline="0" noProof="0" dirty="0">
+              <a:ln>
+                <a:noFill/>
+              </a:ln>
+              <a:solidFill>
+                <a:prstClr val="black"/>
+              </a:solidFill>
+              <a:effectLst/>
+              <a:uLnTx/>
+              <a:uFillTx/>
+              <a:latin typeface="Calibri" panose="020F0502020204030204"/>
+              <a:ea typeface="+mn-ea"/>
+              <a:cs typeface="+mn-cs"/>
+            </a:endParaRPr>
+          </a:p>
+        </p:txBody>
+      </p:sp>
+      <p:sp>
+        <p:nvSpPr>
+          <p:cNvPr id="30" name="Text 28"/>
+          <p:cNvSpPr/>
+          <p:nvPr/>
+        </p:nvSpPr>
+        <p:spPr>
+          <a:xfrm>
+            <a:off x="5888736" y="4773168"/>
+            <a:ext cx="5989320" cy="402336"/>
+          </a:xfrm>
+          <a:prstGeom prst="rect">
+            <a:avLst/>
+          </a:prstGeom>
+          <a:noFill/>
+          <a:ln/>
+        </p:spPr>
+        <p:txBody>
+          <a:bodyPr wrap="square" lIns="0" tIns="0" rIns="0" bIns="0" rtlCol="0" anchor="ctr"/>
+          <a:lstStyle/>
+          <a:p>
+            <a:pPr marL="0" marR="0" lvl="0" indent="0" algn="l" defTabSz="914400" rtl="0" eaLnBrk="1" fontAlgn="auto" latinLnBrk="0" hangingPunct="1">
+              <a:lnSpc>
+                <a:spcPct val="100000"/>
+              </a:lnSpc>
+              <a:spcBef>
+                <a:spcPts val="0"/>
+              </a:spcBef>
+              <a:spcAft>
+                <a:spcPts val="0"/>
+              </a:spcAft>
+              <a:buClrTx/>
+              <a:buSzTx/>
+              <a:buFontTx/>
+              <a:buNone/>
+              <a:tabLst/>
+              <a:defRPr/>
+            </a:pPr>
+            <a:r>
+              <a:rPr kumimoji="0" lang="en-US" sz="1300" b="0" i="0" u="none" strike="noStrike" kern="1200" cap="none" spc="0" normalizeH="0" baseline="0" noProof="0" dirty="0">
+                <a:ln>
+                  <a:noFill/>
+                </a:ln>
+                <a:solidFill>
+                  <a:srgbClr val="CCCCCC"/>
+                </a:solidFill>
+                <a:effectLst/>
+                <a:uLnTx/>
+                <a:uFillTx/>
+                <a:latin typeface="Arial" pitchFamily="34" charset="0"/>
+                <a:ea typeface="Arial" pitchFamily="34" charset="-122"/>
+                <a:cs typeface="Arial" pitchFamily="34" charset="-120"/>
+              </a:rPr>
+              <a:t>github.com/Muthukumaran2098</a:t>
+            </a:r>
+            <a:endParaRPr kumimoji="0" lang="en-US" sz="1300" b="0" i="0" u="none" strike="noStrike" kern="1200" cap="none" spc="0" normalizeH="0" baseline="0" noProof="0" dirty="0">
+              <a:ln>
+                <a:noFill/>
+              </a:ln>
+              <a:solidFill>
+                <a:prstClr val="black"/>
+              </a:solidFill>
+              <a:effectLst/>
+              <a:uLnTx/>
+              <a:uFillTx/>
+              <a:latin typeface="Calibri" panose="020F0502020204030204"/>
+              <a:ea typeface="+mn-ea"/>
+              <a:cs typeface="+mn-cs"/>
+            </a:endParaRPr>
+          </a:p>
+        </p:txBody>
+      </p:sp>
+      <p:sp>
+        <p:nvSpPr>
+          <p:cNvPr id="31" name="Shape 29"/>
+          <p:cNvSpPr/>
+          <p:nvPr/>
+        </p:nvSpPr>
+        <p:spPr>
+          <a:xfrm>
+            <a:off x="5394960" y="5413248"/>
+            <a:ext cx="402336" cy="402336"/>
+          </a:xfrm>
+          <a:prstGeom prst="rect">
+            <a:avLst/>
+          </a:prstGeom>
+          <a:solidFill>
+            <a:srgbClr val="C8102E"/>
+          </a:solidFill>
+          <a:ln/>
+        </p:spPr>
+        <p:txBody>
+          <a:bodyPr/>
+          <a:lstStyle/>
+          <a:p>
+            <a:pPr marL="0" marR="0" lvl="0" indent="0" algn="l" defTabSz="914400" rtl="0" eaLnBrk="1" fontAlgn="auto" latinLnBrk="0" hangingPunct="1">
+              <a:lnSpc>
+                <a:spcPct val="100000"/>
+              </a:lnSpc>
+              <a:spcBef>
+                <a:spcPts val="0"/>
+              </a:spcBef>
+              <a:spcAft>
+                <a:spcPts val="0"/>
+              </a:spcAft>
+              <a:buClrTx/>
+              <a:buSzTx/>
+              <a:buFontTx/>
+              <a:buNone/>
+              <a:tabLst/>
+              <a:defRPr/>
+            </a:pPr>
+            <a:endParaRPr kumimoji="0" lang="en-US" sz="1800" b="0" i="0" u="none" strike="noStrike" kern="1200" cap="none" spc="0" normalizeH="0" baseline="0" noProof="0">
+              <a:ln>
+                <a:noFill/>
+              </a:ln>
+              <a:solidFill>
+                <a:prstClr val="black"/>
+              </a:solidFill>
+              <a:effectLst/>
+              <a:uLnTx/>
+              <a:uFillTx/>
+              <a:latin typeface="Calibri" panose="020F0502020204030204"/>
+              <a:ea typeface="+mn-ea"/>
+              <a:cs typeface="+mn-cs"/>
+            </a:endParaRPr>
+          </a:p>
+        </p:txBody>
+      </p:sp>
+      <p:sp>
+        <p:nvSpPr>
+          <p:cNvPr id="32" name="Text 30"/>
+          <p:cNvSpPr/>
+          <p:nvPr/>
+        </p:nvSpPr>
+        <p:spPr>
+          <a:xfrm>
+            <a:off x="5394960" y="5413248"/>
+            <a:ext cx="402336" cy="402336"/>
+          </a:xfrm>
+          <a:prstGeom prst="rect">
+            <a:avLst/>
+          </a:prstGeom>
+          <a:noFill/>
+          <a:ln/>
+        </p:spPr>
+        <p:txBody>
+          <a:bodyPr wrap="square" lIns="0" tIns="0" rIns="0" bIns="0" rtlCol="0" anchor="ctr"/>
+          <a:lstStyle/>
+          <a:p>
+            <a:pPr marL="0" marR="0" lvl="0" indent="0" algn="ctr" defTabSz="914400" rtl="0" eaLnBrk="1" fontAlgn="auto" latinLnBrk="0" hangingPunct="1">
+              <a:lnSpc>
+                <a:spcPct val="100000"/>
+              </a:lnSpc>
+              <a:spcBef>
+                <a:spcPts val="0"/>
+              </a:spcBef>
+              <a:spcAft>
+                <a:spcPts val="0"/>
+              </a:spcAft>
+              <a:buClrTx/>
+              <a:buSzTx/>
+              <a:buFontTx/>
+              <a:buNone/>
+              <a:tabLst/>
+              <a:defRPr/>
+            </a:pPr>
+            <a:r>
+              <a:rPr kumimoji="0" lang="en-US" sz="900" b="1" i="0" u="none" strike="noStrike" kern="1200" cap="none" spc="0" normalizeH="0" baseline="0" noProof="0" dirty="0">
+                <a:ln>
+                  <a:noFill/>
+                </a:ln>
+                <a:solidFill>
+                  <a:srgbClr val="FFFFFF"/>
+                </a:solidFill>
+                <a:effectLst/>
+                <a:uLnTx/>
+                <a:uFillTx/>
+                <a:latin typeface="Arial" pitchFamily="34" charset="0"/>
+                <a:ea typeface="Arial" pitchFamily="34" charset="-122"/>
+                <a:cs typeface="Arial" pitchFamily="34" charset="-120"/>
+              </a:rPr>
+              <a:t>in</a:t>
+            </a:r>
+            <a:endParaRPr kumimoji="0" lang="en-US" sz="900" b="0" i="0" u="none" strike="noStrike" kern="1200" cap="none" spc="0" normalizeH="0" baseline="0" noProof="0" dirty="0">
+              <a:ln>
+                <a:noFill/>
+              </a:ln>
+              <a:solidFill>
+                <a:prstClr val="black"/>
+              </a:solidFill>
+              <a:effectLst/>
+              <a:uLnTx/>
+              <a:uFillTx/>
+              <a:latin typeface="Calibri" panose="020F0502020204030204"/>
+              <a:ea typeface="+mn-ea"/>
+              <a:cs typeface="+mn-cs"/>
+            </a:endParaRPr>
+          </a:p>
+        </p:txBody>
+      </p:sp>
+      <p:sp>
+        <p:nvSpPr>
+          <p:cNvPr id="33" name="Text 31"/>
+          <p:cNvSpPr/>
+          <p:nvPr/>
+        </p:nvSpPr>
+        <p:spPr>
+          <a:xfrm>
+            <a:off x="5888736" y="5431536"/>
+            <a:ext cx="5989320" cy="402336"/>
+          </a:xfrm>
+          <a:prstGeom prst="rect">
+            <a:avLst/>
+          </a:prstGeom>
+          <a:noFill/>
+          <a:ln/>
+        </p:spPr>
+        <p:txBody>
+          <a:bodyPr wrap="square" lIns="0" tIns="0" rIns="0" bIns="0" rtlCol="0" anchor="ctr"/>
+          <a:lstStyle/>
+          <a:p>
+            <a:pPr marL="0" marR="0" lvl="0" indent="0" algn="l" defTabSz="914400" rtl="0" eaLnBrk="1" fontAlgn="auto" latinLnBrk="0" hangingPunct="1">
+              <a:lnSpc>
+                <a:spcPct val="100000"/>
+              </a:lnSpc>
+              <a:spcBef>
+                <a:spcPts val="0"/>
+              </a:spcBef>
+              <a:spcAft>
+                <a:spcPts val="0"/>
+              </a:spcAft>
+              <a:buClrTx/>
+              <a:buSzTx/>
+              <a:buFontTx/>
+              <a:buNone/>
+              <a:tabLst/>
+              <a:defRPr/>
+            </a:pPr>
+            <a:r>
+              <a:rPr kumimoji="0" lang="en-US" sz="1300" b="0" i="0" u="none" strike="noStrike" kern="1200" cap="none" spc="0" normalizeH="0" baseline="0" noProof="0" dirty="0">
+                <a:ln>
+                  <a:noFill/>
+                </a:ln>
+                <a:solidFill>
+                  <a:srgbClr val="CCCCCC"/>
+                </a:solidFill>
+                <a:effectLst/>
+                <a:uLnTx/>
+                <a:uFillTx/>
+                <a:latin typeface="Arial" pitchFamily="34" charset="0"/>
+                <a:ea typeface="Arial" pitchFamily="34" charset="-122"/>
+                <a:cs typeface="Arial" pitchFamily="34" charset="-120"/>
+              </a:rPr>
+              <a:t>linkedin.com/in/muthukumaran98</a:t>
+            </a:r>
+            <a:endParaRPr kumimoji="0" lang="en-US" sz="1300" b="0" i="0" u="none" strike="noStrike" kern="1200" cap="none" spc="0" normalizeH="0" baseline="0" noProof="0" dirty="0">
+              <a:ln>
+                <a:noFill/>
+              </a:ln>
+              <a:solidFill>
+                <a:prstClr val="black"/>
+              </a:solidFill>
+              <a:effectLst/>
+              <a:uLnTx/>
+              <a:uFillTx/>
+              <a:latin typeface="Calibri" panose="020F0502020204030204"/>
+              <a:ea typeface="+mn-ea"/>
+              <a:cs typeface="+mn-cs"/>
+            </a:endParaRPr>
+          </a:p>
+        </p:txBody>
+      </p:sp>
+      <p:sp>
+        <p:nvSpPr>
+          <p:cNvPr id="34" name="Text 32"/>
+          <p:cNvSpPr/>
+          <p:nvPr/>
+        </p:nvSpPr>
+        <p:spPr>
+          <a:xfrm>
+            <a:off x="5394960" y="6492240"/>
+            <a:ext cx="6492240" cy="256032"/>
+          </a:xfrm>
+          <a:prstGeom prst="rect">
+            <a:avLst/>
+          </a:prstGeom>
+          <a:noFill/>
+          <a:ln/>
+        </p:spPr>
+        <p:txBody>
+          <a:bodyPr wrap="square" lIns="0" tIns="0" rIns="0" bIns="0" rtlCol="0" anchor="ctr"/>
+          <a:lstStyle/>
+          <a:p>
+            <a:pPr marL="0" marR="0" lvl="0" indent="0" algn="l" defTabSz="914400" rtl="0" eaLnBrk="1" fontAlgn="auto" latinLnBrk="0" hangingPunct="1">
+              <a:lnSpc>
+                <a:spcPct val="100000"/>
+              </a:lnSpc>
+              <a:spcBef>
+                <a:spcPts val="0"/>
+              </a:spcBef>
+              <a:spcAft>
+                <a:spcPts val="0"/>
+              </a:spcAft>
+              <a:buClrTx/>
+              <a:buSzTx/>
+              <a:buFontTx/>
+              <a:buNone/>
+              <a:tabLst/>
+              <a:defRPr/>
+            </a:pPr>
+            <a:r>
+              <a:rPr kumimoji="0" lang="en-US" sz="1000" b="0" i="1" u="none" strike="noStrike" kern="1200" cap="none" spc="0" normalizeH="0" baseline="0" noProof="0" dirty="0">
+                <a:ln>
+                  <a:noFill/>
+                </a:ln>
+                <a:solidFill>
+                  <a:srgbClr val="555555"/>
+                </a:solidFill>
+                <a:effectLst/>
+                <a:uLnTx/>
+                <a:uFillTx/>
+                <a:latin typeface="Arial" pitchFamily="34" charset="0"/>
+                <a:ea typeface="Arial" pitchFamily="34" charset="-122"/>
+                <a:cs typeface="Arial" pitchFamily="34" charset="-120"/>
+              </a:rPr>
+              <a:t>April 2026</a:t>
+            </a:r>
+            <a:endParaRPr kumimoji="0" lang="en-US" sz="1000" b="0" i="0" u="none" strike="noStrike" kern="1200" cap="none" spc="0" normalizeH="0" baseline="0" noProof="0" dirty="0">
+              <a:ln>
+                <a:noFill/>
+              </a:ln>
+              <a:solidFill>
+                <a:prstClr val="black"/>
+              </a:solidFill>
+              <a:effectLst/>
+              <a:uLnTx/>
+              <a:uFillTx/>
+              <a:latin typeface="Calibri" panose="020F0502020204030204"/>
+              <a:ea typeface="+mn-ea"/>
+              <a:cs typeface="+mn-cs"/>
+            </a:endParaRPr>
+          </a:p>
+        </p:txBody>
+      </p:sp>
+      <p:pic>
+        <p:nvPicPr>
+          <p:cNvPr id="36" name="Picture 35">
+            <a:extLst>
+              <a:ext uri="{FF2B5EF4-FFF2-40B4-BE49-F238E27FC236}">
+                <a16:creationId xmlns:a16="http://schemas.microsoft.com/office/drawing/2014/main" id="{FFB94A31-9AD8-6F7D-2637-2433D84AC870}"/>
+              </a:ext>
+            </a:extLst>
+          </p:cNvPr>
+          <p:cNvPicPr>
+            <a:picLocks noChangeAspect="1"/>
+          </p:cNvPicPr>
+          <p:nvPr/>
+        </p:nvPicPr>
+        <p:blipFill>
+          <a:blip r:embed="rId3"/>
+          <a:stretch>
+            <a:fillRect/>
+          </a:stretch>
+        </p:blipFill>
+        <p:spPr>
+          <a:xfrm>
+            <a:off x="866903" y="975236"/>
+            <a:ext cx="3386833" cy="3386833"/>
+          </a:xfrm>
+          <a:prstGeom prst="rect">
+            <a:avLst/>
+          </a:prstGeom>
+        </p:spPr>
+      </p:pic>
+    </p:spTree>
+  </p:cSld>
+  <p:clrMapOvr>
+    <a:masterClrMapping/>
+  </p:clrMapOvr>
+</p:sld>
+</file>
+
+<file path=ppt/slides/slide2.xml><?xml version="1.0" encoding="utf-8"?>
+<p:sld xmlns:a="http://schemas.openxmlformats.org/drawingml/2006/main" xmlns:r="http://schemas.openxmlformats.org/officeDocument/2006/relationships" xmlns:p="http://schemas.openxmlformats.org/presentationml/2006/main">
   <p:cSld name="Slide 1">
     <p:bg>
       <p:bgPr>
@@ -1338,7 +3615,7 @@
               <a:buNone/>
             </a:pPr>
             <a:r>
-              <a:rPr lang="en-US" sz="1150" b="1" dirty="0">
+              <a:rPr lang="en-US" sz="1100" b="1" dirty="0">
                 <a:solidFill>
                   <a:srgbClr val="D4A017"/>
                 </a:solidFill>
@@ -1349,7 +3626,7 @@
               <a:t>Context: </a:t>
             </a:r>
             <a:r>
-              <a:rPr lang="en-US" sz="1150" dirty="0">
+              <a:rPr lang="en-US" sz="1000" dirty="0">
                 <a:solidFill>
                   <a:srgbClr val="FFFFFF"/>
                 </a:solidFill>
@@ -1357,7 +3634,7 @@
                 <a:ea typeface="Arial" pitchFamily="34" charset="-122"/>
                 <a:cs typeface="Arial" pitchFamily="34" charset="-120"/>
               </a:rPr>
-              <a:t>Royal Enfield's RE-Prime app receives thousands of Play Store reviews — impossible to read manually at scale.</a:t>
+              <a:t>Royal Enfield's RE-Prime app has 2,500+ reviews spanning 4 years — users flagging crashes, OTP failures, and unresolved service complaints. At this volume, critical signals get buried in noise. No team can manually read, categorize, and prioritize this feedback at scale — a structured NLP pipeline is the only practical solution</a:t>
             </a:r>
             <a:endParaRPr lang="en-US" sz="1150" dirty="0"/>
           </a:p>
@@ -1371,7 +3648,7 @@
         </p:nvSpPr>
         <p:spPr>
           <a:xfrm>
-            <a:off x="576072" y="2532888"/>
+            <a:off x="585216" y="2676113"/>
             <a:ext cx="5120640" cy="594360"/>
           </a:xfrm>
           <a:prstGeom prst="rect">
@@ -1387,6 +3664,17 @@
             <a:pPr marL="0" indent="0">
               <a:buNone/>
             </a:pPr>
+            <a:r>
+              <a:rPr lang="en-US" sz="1100" b="1" dirty="0">
+                <a:solidFill>
+                  <a:srgbClr val="D4A017"/>
+                </a:solidFill>
+                <a:latin typeface="Arial" pitchFamily="34" charset="0"/>
+                <a:ea typeface="Arial" pitchFamily="34" charset="-122"/>
+                <a:cs typeface="Arial" pitchFamily="34" charset="-120"/>
+              </a:rPr>
+              <a:t>Goal:</a:t>
+            </a:r>
             <a:r>
               <a:rPr lang="en-US" sz="1150" b="1" dirty="0">
                 <a:solidFill>
@@ -1396,10 +3684,68 @@
                 <a:ea typeface="Arial" pitchFamily="34" charset="-122"/>
                 <a:cs typeface="Arial" pitchFamily="34" charset="-120"/>
               </a:rPr>
-              <a:t>Goal: </a:t>
+              <a:t> </a:t>
             </a:r>
             <a:r>
-              <a:rPr lang="en-US" sz="1150" dirty="0">
+              <a:rPr lang="en-US" sz="1000" dirty="0">
+                <a:solidFill>
+                  <a:srgbClr val="FFFFFF"/>
+                </a:solidFill>
+                <a:latin typeface="Arial" pitchFamily="34" charset="0"/>
+                <a:cs typeface="Arial" pitchFamily="34" charset="-120"/>
+              </a:rPr>
+              <a:t>Extracting structured L1 (topic) + L2 (business impact) intent from unstructured reviews — moving beyond star ratings to understand what users are frustrated about and why it matters to the business. The output is a prioritized, evidence-backed list that maps directly to engineering and product </a:t>
+            </a:r>
+            <a:r>
+              <a:rPr lang="en-US" sz="1100" dirty="0">
+                <a:solidFill>
+                  <a:srgbClr val="FFFFFF"/>
+                </a:solidFill>
+                <a:latin typeface="Arial" pitchFamily="34" charset="0"/>
+                <a:cs typeface="Arial" pitchFamily="34" charset="-120"/>
+              </a:rPr>
+              <a:t>decisions</a:t>
+            </a:r>
+          </a:p>
+        </p:txBody>
+      </p:sp>
+      <p:sp>
+        <p:nvSpPr>
+          <p:cNvPr id="11" name="Text 9"/>
+          <p:cNvSpPr/>
+          <p:nvPr/>
+        </p:nvSpPr>
+        <p:spPr>
+          <a:xfrm>
+            <a:off x="576072" y="3442819"/>
+            <a:ext cx="5120640" cy="685800"/>
+          </a:xfrm>
+          <a:prstGeom prst="rect">
+            <a:avLst/>
+          </a:prstGeom>
+          <a:noFill/>
+          <a:ln/>
+        </p:spPr>
+        <p:txBody>
+          <a:bodyPr wrap="square" rtlCol="0" anchor="ctr"/>
+          <a:lstStyle/>
+          <a:p>
+            <a:pPr marL="0" indent="0">
+              <a:buNone/>
+            </a:pPr>
+            <a:r>
+              <a:rPr lang="en-US" sz="1100" b="1" dirty="0">
+                <a:solidFill>
+                  <a:srgbClr val="D4A017"/>
+                </a:solidFill>
+                <a:latin typeface="Arial" pitchFamily="34" charset="0"/>
+                <a:ea typeface="Arial" pitchFamily="34" charset="-122"/>
+                <a:cs typeface="Arial" pitchFamily="34" charset="-120"/>
+              </a:rPr>
+              <a:t>Outcome: </a:t>
+            </a:r>
+            <a:r>
+              <a:rPr lang="en-US" sz="1000" dirty="0">
                 <a:solidFill>
                   <a:srgbClr val="FFFFFF"/>
                 </a:solidFill>
@@ -1407,7 +3753,7 @@
                 <a:ea typeface="Arial" pitchFamily="34" charset="-122"/>
                 <a:cs typeface="Arial" pitchFamily="34" charset="-120"/>
               </a:rPr>
-              <a:t>Extract structured L1 (topic) + L2 (business impact) intent from unstructured text.</a:t>
+              <a:t>Translating raw reviews into a data-driven, prioritised product roadmap — each issue scored P0 to P3 based on frequency and business impact. Product and engineering teams get a clear, ranked action list they can take straight into planning, without reading a single review manually.</a:t>
             </a:r>
             <a:endParaRPr lang="en-US" sz="1150" dirty="0"/>
           </a:p>
@@ -1415,63 +3761,13 @@
       </p:sp>
       <p:sp>
         <p:nvSpPr>
-          <p:cNvPr id="11" name="Text 9"/>
-          <p:cNvSpPr/>
-          <p:nvPr/>
-        </p:nvSpPr>
-        <p:spPr>
-          <a:xfrm>
-            <a:off x="576072" y="3209544"/>
-            <a:ext cx="5120640" cy="685800"/>
-          </a:xfrm>
-          <a:prstGeom prst="rect">
-            <a:avLst/>
-          </a:prstGeom>
-          <a:noFill/>
-          <a:ln/>
-        </p:spPr>
-        <p:txBody>
-          <a:bodyPr wrap="square" rtlCol="0" anchor="ctr"/>
-          <a:lstStyle/>
-          <a:p>
-            <a:pPr marL="0" indent="0">
-              <a:buNone/>
-            </a:pPr>
-            <a:r>
-              <a:rPr lang="en-US" sz="1150" b="1" dirty="0">
-                <a:solidFill>
-                  <a:srgbClr val="D4A017"/>
-                </a:solidFill>
-                <a:latin typeface="Arial" pitchFamily="34" charset="0"/>
-                <a:ea typeface="Arial" pitchFamily="34" charset="-122"/>
-                <a:cs typeface="Arial" pitchFamily="34" charset="-120"/>
-              </a:rPr>
-              <a:t>Outcome: </a:t>
-            </a:r>
-            <a:r>
-              <a:rPr lang="en-US" sz="1150" dirty="0">
-                <a:solidFill>
-                  <a:srgbClr val="FFFFFF"/>
-                </a:solidFill>
-                <a:latin typeface="Arial" pitchFamily="34" charset="0"/>
-                <a:ea typeface="Arial" pitchFamily="34" charset="-122"/>
-                <a:cs typeface="Arial" pitchFamily="34" charset="-120"/>
-              </a:rPr>
-              <a:t>Translate raw user feedback into a data-driven, prioritized product roadmap with P0-P3 scoring.</a:t>
-            </a:r>
-            <a:endParaRPr lang="en-US" sz="1150" dirty="0"/>
-          </a:p>
-        </p:txBody>
-      </p:sp>
-      <p:sp>
-        <p:nvSpPr>
           <p:cNvPr id="12" name="Shape 10"/>
           <p:cNvSpPr/>
           <p:nvPr/>
         </p:nvSpPr>
         <p:spPr>
           <a:xfrm>
-            <a:off x="576072" y="3995928"/>
+            <a:off x="576072" y="4294516"/>
             <a:ext cx="2331720" cy="685800"/>
           </a:xfrm>
           <a:prstGeom prst="rect">
@@ -1503,7 +3799,7 @@
         </p:nvSpPr>
         <p:spPr>
           <a:xfrm>
-            <a:off x="612648" y="4023360"/>
+            <a:off x="612648" y="4321948"/>
             <a:ext cx="2240280" cy="228600"/>
           </a:xfrm>
           <a:prstGeom prst="rect">
@@ -1542,7 +3838,7 @@
         </p:nvSpPr>
         <p:spPr>
           <a:xfrm>
-            <a:off x="612648" y="4270248"/>
+            <a:off x="612648" y="4568836"/>
             <a:ext cx="2240280" cy="365760"/>
           </a:xfrm>
           <a:prstGeom prst="rect">
@@ -1598,7 +3894,7 @@
         </p:nvSpPr>
         <p:spPr>
           <a:xfrm>
-            <a:off x="3063240" y="3995928"/>
+            <a:off x="3063240" y="4294516"/>
             <a:ext cx="2560320" cy="685800"/>
           </a:xfrm>
           <a:prstGeom prst="rect">
@@ -1630,7 +3926,7 @@
         </p:nvSpPr>
         <p:spPr>
           <a:xfrm>
-            <a:off x="3099816" y="4023360"/>
+            <a:off x="3099816" y="4321948"/>
             <a:ext cx="2468880" cy="228600"/>
           </a:xfrm>
           <a:prstGeom prst="rect">
@@ -1669,7 +3965,7 @@
         </p:nvSpPr>
         <p:spPr>
           <a:xfrm>
-            <a:off x="3099816" y="4270248"/>
+            <a:off x="3099816" y="4568836"/>
             <a:ext cx="2468880" cy="365760"/>
           </a:xfrm>
           <a:prstGeom prst="rect">
@@ -1725,7 +4021,7 @@
         </p:nvSpPr>
         <p:spPr>
           <a:xfrm>
-            <a:off x="576072" y="4782312"/>
+            <a:off x="576072" y="5155538"/>
             <a:ext cx="5120640" cy="1078992"/>
           </a:xfrm>
           <a:prstGeom prst="rect">
@@ -1757,7 +4053,7 @@
         </p:nvSpPr>
         <p:spPr>
           <a:xfrm>
-            <a:off x="576072" y="4782312"/>
+            <a:off x="576072" y="5146207"/>
             <a:ext cx="5120640" cy="256032"/>
           </a:xfrm>
           <a:prstGeom prst="rect">
@@ -1784,7 +4080,7 @@
         </p:nvSpPr>
         <p:spPr>
           <a:xfrm>
-            <a:off x="630936" y="4800600"/>
+            <a:off x="630936" y="5164495"/>
             <a:ext cx="5029200" cy="201168"/>
           </a:xfrm>
           <a:prstGeom prst="rect">
@@ -1823,7 +4119,7 @@
         </p:nvSpPr>
         <p:spPr>
           <a:xfrm>
-            <a:off x="630936" y="5074920"/>
+            <a:off x="630936" y="5438815"/>
             <a:ext cx="5029200" cy="731520"/>
           </a:xfrm>
           <a:prstGeom prst="rect">
@@ -1939,7 +4235,7 @@
           <a:bodyPr/>
           <a:lstStyle/>
           <a:p>
-            <a:endParaRPr lang="en-US"/>
+            <a:endParaRPr lang="en-US" dirty="0"/>
           </a:p>
         </p:txBody>
       </p:sp>
@@ -2147,7 +4443,7 @@
                 <a:ea typeface="Arial" pitchFamily="34" charset="-122"/>
                 <a:cs typeface="Arial" pitchFamily="34" charset="-120"/>
               </a:rPr>
-              <a:t>google-play-scraper fetches real reviews from India region (com.royalenfield.reprime) with rate limiting &amp; deduplication</a:t>
+              <a:t>google-play-scraper — chosen for its reliable pagination via continuation tokens, built-in rate limiting to avoid Play Store throttling, and review-level deduplication to ensure clean, unique data. Targets India region specifically since RE-Prime's primary user base is domestic.</a:t>
             </a:r>
             <a:endParaRPr lang="en-US" sz="1000" dirty="0"/>
           </a:p>
@@ -2266,8 +4562,8 @@
         </p:nvSpPr>
         <p:spPr>
           <a:xfrm>
-            <a:off x="7086600" y="3236976"/>
-            <a:ext cx="4617720" cy="640080"/>
+            <a:off x="7086600" y="3255638"/>
+            <a:ext cx="4617720" cy="703714"/>
           </a:xfrm>
           <a:prstGeom prst="rect">
             <a:avLst/>
@@ -2291,7 +4587,7 @@
                 <a:ea typeface="Arial" pitchFamily="34" charset="-122"/>
                 <a:cs typeface="Arial" pitchFamily="34" charset="-120"/>
               </a:rPr>
-              <a:t>Each review gets an L1 topic (keyword NLP, extendable to BERT) and L2 business impact via rule mapping</a:t>
+              <a:t>Keyword NLP assigns each review an L1 topic — chosen for its interpretability and zero infrastructure overhead, with the architecture designed to swap in a fine-tuned BERT model in production. L2 business impact is derived via rule mapping, translating topics directly into consequences the business cares about — retention, revenue, trust.</a:t>
             </a:r>
             <a:endParaRPr lang="en-US" sz="1000" dirty="0"/>
           </a:p>
@@ -2435,7 +4731,7 @@
                 <a:ea typeface="Arial" pitchFamily="34" charset="-122"/>
                 <a:cs typeface="Arial" pitchFamily="34" charset="-120"/>
               </a:rPr>
-              <a:t>Issues scored: Frequency (60%) + Impact score (40%) -&gt; P0 Critical through P3 Low</a:t>
+              <a:t>Issues scored by Frequency (60%) + Impact (40%) — weighted because a problem affecting many users moderately outranks one affecting few users severely. Output maps directly to P0–P3 sprint priorities</a:t>
             </a:r>
             <a:endParaRPr lang="en-US" sz="1000" dirty="0"/>
           </a:p>
@@ -2579,7 +4875,7 @@
                 <a:ea typeface="Arial" pitchFamily="34" charset="-122"/>
                 <a:cs typeface="Arial" pitchFamily="34" charset="-120"/>
               </a:rPr>
-              <a:t>Data-driven action items with timelines, verbatim quotes, and a scaling roadmap to production</a:t>
+              <a:t>Findings translated into concrete action items — each tied to real review volume, verbatim user quotes as evidence, and a clear timeline. Paired with a scaling roadmap that takes this POC to a production-grade, real-time monitoring pipeline</a:t>
             </a:r>
             <a:endParaRPr lang="en-US" sz="1000" dirty="0"/>
           </a:p>
@@ -2706,7 +5002,7 @@
 </p:sld>
 </file>
 
-<file path=ppt/slides/slide2.xml><?xml version="1.0" encoding="utf-8"?>
+<file path=ppt/slides/slide3.xml><?xml version="1.0" encoding="utf-8"?>
 <p:sld xmlns:a="http://schemas.openxmlformats.org/drawingml/2006/main" xmlns:r="http://schemas.openxmlformats.org/officeDocument/2006/relationships" xmlns:p="http://schemas.openxmlformats.org/presentationml/2006/main">
   <p:cSld name="Slide 2">
     <p:bg>
@@ -3554,7 +5850,7 @@
 </p:sld>
 </file>
 
-<file path=ppt/slides/slide3.xml><?xml version="1.0" encoding="utf-8"?>
+<file path=ppt/slides/slide4.xml><?xml version="1.0" encoding="utf-8"?>
 <p:sld xmlns:a="http://schemas.openxmlformats.org/drawingml/2006/main" xmlns:r="http://schemas.openxmlformats.org/officeDocument/2006/relationships" xmlns:p="http://schemas.openxmlformats.org/presentationml/2006/main">
   <p:cSld name="Slide 3">
     <p:bg>
@@ -5375,7 +7671,7 @@
 </p:sld>
 </file>
 
-<file path=ppt/slides/slide4.xml><?xml version="1.0" encoding="utf-8"?>
+<file path=ppt/slides/slide5.xml><?xml version="1.0" encoding="utf-8"?>
 <p:sld xmlns:a="http://schemas.openxmlformats.org/drawingml/2006/main" xmlns:r="http://schemas.openxmlformats.org/officeDocument/2006/relationships" xmlns:p="http://schemas.openxmlformats.org/presentationml/2006/main">
   <p:cSld name="Slide 4">
     <p:bg>
@@ -7806,7 +10102,7 @@
 </p:sld>
 </file>
 
-<file path=ppt/slides/slide5.xml><?xml version="1.0" encoding="utf-8"?>
+<file path=ppt/slides/slide6.xml><?xml version="1.0" encoding="utf-8"?>
 <p:sld xmlns:a="http://schemas.openxmlformats.org/drawingml/2006/main" xmlns:r="http://schemas.openxmlformats.org/officeDocument/2006/relationships" xmlns:p="http://schemas.openxmlformats.org/presentationml/2006/main">
   <p:cSld name="Slide 5">
     <p:bg>
@@ -8133,9 +10429,21 @@
                 <a:ea typeface="Arial" pitchFamily="34" charset="-122"/>
                 <a:cs typeface="Arial" pitchFamily="34" charset="-120"/>
               </a:rPr>
-              <a:t>Fix app crashes, login failures &amp; buffering</a:t>
+              <a:t>The app fails at its most basic functions — users can't log in, book a service, or even open the app without crashing or buffering. Highest review volume, lowest average rating. Every day unfixed is a user lost.</a:t>
             </a:r>
-            <a:endParaRPr lang="en-US" sz="1000" dirty="0"/>
+          </a:p>
+          <a:p>
+            <a:pPr marL="0" indent="0">
+              <a:buNone/>
+            </a:pPr>
+            <a:endParaRPr lang="en-US" sz="1000" dirty="0">
+              <a:solidFill>
+                <a:srgbClr val="FFFFFF"/>
+              </a:solidFill>
+              <a:latin typeface="Arial" pitchFamily="34" charset="0"/>
+              <a:ea typeface="Arial" pitchFamily="34" charset="-122"/>
+              <a:cs typeface="Arial" pitchFamily="34" charset="-120"/>
+            </a:endParaRPr>
           </a:p>
           <a:p>
             <a:pPr marL="0" indent="0">
@@ -8326,9 +10634,21 @@
                 <a:ea typeface="Arial" pitchFamily="34" charset="-122"/>
                 <a:cs typeface="Arial" pitchFamily="34" charset="-120"/>
               </a:rPr>
-              <a:t>Fix bugs: firmware sync, OTP, session timeouts</a:t>
+              <a:t>Core app workflows are broken — firmware updates fail to sync, OTPs don't arrive or expire before use, and sessions time out mid-action. Users are actively trying to engage with the app and being blocked at every step. Directly erodes trust and drives negative reviews.</a:t>
             </a:r>
-            <a:endParaRPr lang="en-US" sz="1000" dirty="0"/>
+          </a:p>
+          <a:p>
+            <a:pPr marL="0" indent="0">
+              <a:buNone/>
+            </a:pPr>
+            <a:endParaRPr lang="en-US" sz="1000" dirty="0">
+              <a:solidFill>
+                <a:srgbClr val="FFFFFF"/>
+              </a:solidFill>
+              <a:latin typeface="Arial" pitchFamily="34" charset="0"/>
+              <a:ea typeface="Arial" pitchFamily="34" charset="-122"/>
+              <a:cs typeface="Arial" pitchFamily="34" charset="-120"/>
+            </a:endParaRPr>
           </a:p>
           <a:p>
             <a:pPr marL="0" indent="0">
@@ -8519,9 +10839,21 @@
                 <a:ea typeface="Arial" pitchFamily="34" charset="-122"/>
                 <a:cs typeface="Arial" pitchFamily="34" charset="-120"/>
               </a:rPr>
-              <a:t>Add in-app complaint tracker &amp; improve support SLA</a:t>
+              <a:t>Users complain but hear nothing back — no ticket, no status, no resolution. The absence of an in-app complaint tracker means every support issue becomes a 1-star review. Improving support visibility directly reduces avoidable negative ratings and strengthens brand trust.</a:t>
             </a:r>
-            <a:endParaRPr lang="en-US" sz="1000" dirty="0"/>
+          </a:p>
+          <a:p>
+            <a:pPr marL="0" indent="0">
+              <a:buNone/>
+            </a:pPr>
+            <a:endParaRPr lang="en-US" sz="1000" dirty="0">
+              <a:solidFill>
+                <a:srgbClr val="FFFFFF"/>
+              </a:solidFill>
+              <a:latin typeface="Arial" pitchFamily="34" charset="0"/>
+              <a:ea typeface="Arial" pitchFamily="34" charset="-122"/>
+              <a:cs typeface="Arial" pitchFamily="34" charset="-120"/>
+            </a:endParaRPr>
           </a:p>
           <a:p>
             <a:pPr marL="0" indent="0">
@@ -8712,9 +11044,21 @@
                 <a:ea typeface="Arial" pitchFamily="34" charset="-122"/>
                 <a:cs typeface="Arial" pitchFamily="34" charset="-120"/>
               </a:rPr>
-              <a:t>Enhance configurator, trip tools &amp; community features</a:t>
+              <a:t>The bike configurator, trip planning, and community features are what loyal users actually love — cited positively across 4-5 star reviews. These aren't urgent fixes but active growth levers. Investing here converts satisfied users into advocates.</a:t>
             </a:r>
-            <a:endParaRPr lang="en-US" sz="1000" dirty="0"/>
+          </a:p>
+          <a:p>
+            <a:pPr marL="0" indent="0">
+              <a:buNone/>
+            </a:pPr>
+            <a:endParaRPr lang="en-US" sz="1000" dirty="0">
+              <a:solidFill>
+                <a:srgbClr val="FFFFFF"/>
+              </a:solidFill>
+              <a:latin typeface="Arial" pitchFamily="34" charset="0"/>
+              <a:ea typeface="Arial" pitchFamily="34" charset="-122"/>
+              <a:cs typeface="Arial" pitchFamily="34" charset="-120"/>
+            </a:endParaRPr>
           </a:p>
           <a:p>
             <a:pPr marL="0" indent="0">
@@ -9622,7 +11966,7 @@
 </p:sld>
 </file>
 
-<file path=ppt/slides/slide6.xml><?xml version="1.0" encoding="utf-8"?>
+<file path=ppt/slides/slide7.xml><?xml version="1.0" encoding="utf-8"?>
 <p:sld xmlns:a="http://schemas.openxmlformats.org/drawingml/2006/main" xmlns:r="http://schemas.openxmlformats.org/officeDocument/2006/relationships" xmlns:p="http://schemas.openxmlformats.org/presentationml/2006/main">
   <p:cSld name="Slide 6">
     <p:spTree>
